--- a/Data Science Capstone Project Report.pptx
+++ b/Data Science Capstone Project Report.pptx
@@ -22,6 +22,7 @@
     <p:sldId id="270" r:id="rId21"/>
     <p:sldId id="271" r:id="rId22"/>
     <p:sldId id="272" r:id="rId23"/>
+    <p:sldId id="273" r:id="rId24"/>
   </p:sldIdLst>
   <p:sldSz cx="12191695" cy="6858000" type="screen4x3"/>
   <p:notesSz cx="6858000" cy="9144000"/>
@@ -3113,7 +3114,7 @@
         <p:spPr>
           <a:xfrm>
             <a:off x="0" y="0"/>
-            <a:ext cx="12191695" cy="2011680"/>
+            <a:ext cx="12191695" cy="6858000"/>
           </a:xfrm>
           <a:prstGeom prst="rect">
             <a:avLst/>
@@ -3157,8 +3158,8 @@
         </p:nvSpPr>
         <p:spPr>
           <a:xfrm>
-            <a:off x="0" y="2011680"/>
-            <a:ext cx="12191695" cy="54864"/>
+            <a:off x="0" y="3931920"/>
+            <a:ext cx="12191695" cy="73152"/>
           </a:xfrm>
           <a:prstGeom prst="rect">
             <a:avLst/>
@@ -3202,8 +3203,8 @@
         </p:nvSpPr>
         <p:spPr>
           <a:xfrm>
-            <a:off x="731520" y="365760"/>
-            <a:ext cx="10698480" cy="1371600"/>
+            <a:off x="731520" y="1097280"/>
+            <a:ext cx="10698480" cy="2011680"/>
           </a:xfrm>
           <a:prstGeom prst="rect">
             <a:avLst/>
@@ -3217,7 +3218,7 @@
           <a:lstStyle/>
           <a:p>
             <a:pPr>
-              <a:defRPr sz="2800" b="1">
+              <a:defRPr sz="3600" b="1">
                 <a:solidFill>
                   <a:srgbClr val="FFFFFF"/>
                 </a:solidFill>
@@ -3230,15 +3231,18 @@
           </a:p>
           <a:p>
             <a:pPr>
-              <a:defRPr sz="1600">
-                <a:solidFill>
-                  <a:srgbClr val="E2E8F0"/>
+              <a:spcBef>
+                <a:spcPts val="1200"/>
+              </a:spcBef>
+              <a:defRPr sz="1500">
+                <a:solidFill>
+                  <a:srgbClr val="D4AF37"/>
                 </a:solidFill>
                 <a:latin typeface="Arial"/>
               </a:defRPr>
             </a:pPr>
             <a:r>
-              <a:t>Applied Data Science Capstone Project - Final Presentation</a:t>
+              <a:t>Complete Capstone Report: Data Ingestion, EDA, SQL, Geospatial Folium, Plotly Dash, Machine Learning &amp; Business Strategy</a:t>
             </a:r>
           </a:p>
         </p:txBody>
@@ -3251,8 +3255,8 @@
         </p:nvSpPr>
         <p:spPr>
           <a:xfrm>
-            <a:off x="914400" y="2468880"/>
-            <a:ext cx="10362895" cy="3657600"/>
+            <a:off x="731520" y="4206240"/>
+            <a:ext cx="10698480" cy="2194560"/>
           </a:xfrm>
           <a:prstGeom prst="rect">
             <a:avLst/>
@@ -3264,143 +3268,46 @@
             <a:spAutoFit/>
           </a:bodyPr>
           <a:lstStyle/>
-          <a:p/>
-          <a:p>
-            <a:pPr>
-              <a:spcAft>
-                <a:spcPts val="1200"/>
-              </a:spcAft>
-            </a:pPr>
-            <a:r>
-              <a:rPr b="1" sz="1400">
-                <a:solidFill>
-                  <a:srgbClr val="1B365D"/>
-                </a:solidFill>
-              </a:rPr>
-              <a:t>Author / Learner: </a:t>
-            </a:r>
-            <a:r>
-              <a:rPr sz="1400">
-                <a:solidFill>
-                  <a:srgbClr val="1E293B"/>
-                </a:solidFill>
-              </a:rPr>
-              <a:t>alfaturachman</a:t>
-            </a:r>
-          </a:p>
-          <a:p>
-            <a:pPr>
-              <a:spcAft>
-                <a:spcPts val="1200"/>
-              </a:spcAft>
-            </a:pPr>
-            <a:r>
-              <a:rPr b="1" sz="1400">
-                <a:solidFill>
-                  <a:srgbClr val="1B365D"/>
-                </a:solidFill>
-              </a:rPr>
-              <a:t>Course Platform: </a:t>
-            </a:r>
-            <a:r>
-              <a:rPr sz="1400">
-                <a:solidFill>
-                  <a:srgbClr val="1E293B"/>
-                </a:solidFill>
-              </a:rPr>
-              <a:t>IBM Data Science Professional Certificate | Coursera</a:t>
-            </a:r>
-          </a:p>
-          <a:p>
-            <a:pPr>
-              <a:spcAft>
-                <a:spcPts val="1200"/>
-              </a:spcAft>
-            </a:pPr>
-            <a:r>
-              <a:rPr b="1" sz="1400">
-                <a:solidFill>
-                  <a:srgbClr val="1B365D"/>
-                </a:solidFill>
-              </a:rPr>
-              <a:t>Project Scope: </a:t>
-            </a:r>
-            <a:r>
-              <a:rPr sz="1400">
-                <a:solidFill>
-                  <a:srgbClr val="1E293B"/>
-                </a:solidFill>
-              </a:rPr>
-              <a:t>Applied Data Science Capstone (Modules 1 - 5)</a:t>
-            </a:r>
-          </a:p>
-          <a:p>
-            <a:pPr>
-              <a:spcAft>
-                <a:spcPts val="1200"/>
-              </a:spcAft>
-            </a:pPr>
-            <a:r>
-              <a:rPr b="1" sz="1400">
-                <a:solidFill>
-                  <a:srgbClr val="1B365D"/>
-                </a:solidFill>
-              </a:rPr>
-              <a:t>Public GitHub Repository: </a:t>
-            </a:r>
-            <a:r>
-              <a:rPr sz="1400">
-                <a:solidFill>
-                  <a:srgbClr val="1E293B"/>
-                </a:solidFill>
-              </a:rPr>
-              <a:t>https://github.com/alfaturachman/IBM-Applied-Data-Science-Capstone</a:t>
-            </a:r>
-          </a:p>
-          <a:p>
-            <a:pPr>
-              <a:spcAft>
-                <a:spcPts val="1200"/>
-              </a:spcAft>
-            </a:pPr>
-            <a:r>
-              <a:rPr b="1" sz="1400">
-                <a:solidFill>
-                  <a:srgbClr val="1B365D"/>
-                </a:solidFill>
-              </a:rPr>
-              <a:t>Deliverables Included: </a:t>
-            </a:r>
-            <a:r>
-              <a:rPr sz="1400">
-                <a:solidFill>
-                  <a:srgbClr val="1E293B"/>
-                </a:solidFill>
-              </a:rPr>
-              <a:t>Executed Jupyter Notebooks (Parts 1-5), SQLite Database, Folium Map, Plotly Dash App</a:t>
-            </a:r>
-          </a:p>
-          <a:p>
-            <a:pPr>
-              <a:spcAft>
-                <a:spcPts val="1200"/>
-              </a:spcAft>
-            </a:pPr>
-            <a:r>
-              <a:rPr b="1" sz="1400">
-                <a:solidFill>
-                  <a:srgbClr val="1B365D"/>
-                </a:solidFill>
-              </a:rPr>
-              <a:t>Submission Date: </a:t>
-            </a:r>
-            <a:r>
-              <a:rPr sz="1400">
-                <a:solidFill>
-                  <a:srgbClr val="1E293B"/>
-                </a:solidFill>
-              </a:rPr>
-              <a:t>October 2026</a:t>
+          <a:p>
+            <a:pPr>
+              <a:defRPr sz="1400" b="1">
+                <a:solidFill>
+                  <a:srgbClr val="FFFFFF"/>
+                </a:solidFill>
+              </a:defRPr>
+            </a:pPr>
+            <a:r>
+              <a:t>Principal Author: Alfaturachman</a:t>
+            </a:r>
+          </a:p>
+          <a:p>
+            <a:pPr>
+              <a:spcBef>
+                <a:spcPts val="400"/>
+              </a:spcBef>
+              <a:defRPr sz="1300">
+                <a:solidFill>
+                  <a:srgbClr val="CBD5E1"/>
+                </a:solidFill>
+              </a:defRPr>
+            </a:pPr>
+            <a:r>
+              <a:t>Program: IBM Data Science Professional Certificate | Coursera Capstone</a:t>
+            </a:r>
+          </a:p>
+          <a:p>
+            <a:pPr>
+              <a:spcBef>
+                <a:spcPts val="800"/>
+              </a:spcBef>
+              <a:defRPr sz="1200">
+                <a:solidFill>
+                  <a:srgbClr val="D4AF37"/>
+                </a:solidFill>
+              </a:defRPr>
+            </a:pPr>
+            <a:r>
+              <a:t>GitHub Repository: https://github.com/Alfaturachman/IBM-Applied-Data-Science-Capstone</a:t>
             </a:r>
           </a:p>
         </p:txBody>
@@ -3544,27 +3451,63 @@
               </a:defRPr>
             </a:pPr>
             <a:r>
-              <a:t>Predictive Analysis (Classification) Methodology</a:t>
+              <a:t>EDA with Visualization Results: Success Rate by Orbit Type</a:t>
             </a:r>
           </a:p>
           <a:p>
             <a:pPr>
               <a:defRPr sz="1100">
                 <a:solidFill>
-                  <a:srgbClr val="E2E8F0"/>
+                  <a:srgbClr val="D4AF37"/>
                 </a:solidFill>
                 <a:latin typeface="Arial"/>
               </a:defRPr>
             </a:pPr>
             <a:r>
-              <a:t>Feature Standardization, Train-Test Partitioning, Cross-Validation, and Hyperparameter Tuning</a:t>
-            </a:r>
-          </a:p>
-        </p:txBody>
-      </p:sp>
-      <p:sp>
-        <p:nvSpPr>
-          <p:cNvPr id="5" name="Rectangle 4"/>
+              <a:t>Analyzing Re-entry Thermodynamics and Energy Requirements Across Orbital Targets</a:t>
+            </a:r>
+          </a:p>
+        </p:txBody>
+      </p:sp>
+      <p:sp>
+        <p:nvSpPr>
+          <p:cNvPr id="5" name="TextBox 4"/>
+          <p:cNvSpPr txBox="1"/>
+          <p:nvPr/>
+        </p:nvSpPr>
+        <p:spPr>
+          <a:xfrm>
+            <a:off x="8412480" y="137160"/>
+            <a:ext cx="3291840" cy="548640"/>
+          </a:xfrm>
+          <a:prstGeom prst="rect">
+            <a:avLst/>
+          </a:prstGeom>
+          <a:noFill/>
+        </p:spPr>
+        <p:txBody>
+          <a:bodyPr wrap="none">
+            <a:spAutoFit/>
+          </a:bodyPr>
+          <a:lstStyle/>
+          <a:p>
+            <a:pPr>
+              <a:defRPr sz="1100" b="1">
+                <a:solidFill>
+                  <a:srgbClr val="FFFFFF"/>
+                </a:solidFill>
+                <a:latin typeface="Arial"/>
+              </a:defRPr>
+            </a:pPr>
+            <a:r>
+              <a:t>IBM Applied Data Science Capstone</a:t>
+            </a:r>
+          </a:p>
+        </p:txBody>
+      </p:sp>
+      <p:sp>
+        <p:nvSpPr>
+          <p:cNvPr id="6" name="Rectangle 5"/>
           <p:cNvSpPr/>
           <p:nvPr/>
         </p:nvSpPr>
@@ -3609,13 +3552,13 @@
       </p:sp>
       <p:sp>
         <p:nvSpPr>
-          <p:cNvPr id="6" name="TextBox 5"/>
+          <p:cNvPr id="7" name="TextBox 6"/>
           <p:cNvSpPr txBox="1"/>
           <p:nvPr/>
         </p:nvSpPr>
         <p:spPr>
           <a:xfrm>
-            <a:off x="457200" y="6473952"/>
+            <a:off x="457200" y="6492240"/>
             <a:ext cx="11277295" cy="320040"/>
           </a:xfrm>
           <a:prstGeom prst="rect">
@@ -3630,7 +3573,7 @@
           <a:lstStyle/>
           <a:p>
             <a:pPr>
-              <a:defRPr sz="1000">
+              <a:defRPr sz="950">
                 <a:solidFill>
                   <a:srgbClr val="64748B"/>
                 </a:solidFill>
@@ -3638,21 +3581,21 @@
               </a:defRPr>
             </a:pPr>
             <a:r>
-              <a:t>IBM Applied Data Science Capstone | Learner: alfaturachman | GitHub: https://github.com/alfaturachman/IBM-Applied-Data-Science-Capstone</a:t>
-            </a:r>
-          </a:p>
-        </p:txBody>
-      </p:sp>
-      <p:sp>
-        <p:nvSpPr>
-          <p:cNvPr id="7" name="TextBox 6"/>
+              <a:t>SpaceX Falcon 9 Landing Prediction | Executive Portfolio Report | Learner: alfaturachman</a:t>
+            </a:r>
+          </a:p>
+        </p:txBody>
+      </p:sp>
+      <p:sp>
+        <p:nvSpPr>
+          <p:cNvPr id="8" name="TextBox 7"/>
           <p:cNvSpPr txBox="1"/>
           <p:nvPr/>
         </p:nvSpPr>
         <p:spPr>
           <a:xfrm>
-            <a:off x="548640" y="1051560"/>
-            <a:ext cx="11094415" cy="5212080"/>
+            <a:off x="548640" y="1005840"/>
+            <a:ext cx="6217920" cy="5303520"/>
           </a:xfrm>
           <a:prstGeom prst="rect">
             <a:avLst/>
@@ -3664,141 +3607,164 @@
             <a:spAutoFit/>
           </a:bodyPr>
           <a:lstStyle/>
-          <a:p/>
           <a:p>
             <a:pPr>
               <a:spcBef>
-                <a:spcPts val="800"/>
+                <a:spcPts val="0"/>
               </a:spcBef>
               <a:spcAft>
-                <a:spcPts val="200"/>
-              </a:spcAft>
-            </a:pPr>
-            <a:r>
-              <a:rPr b="1" sz="1300">
+                <a:spcPts val="100"/>
+              </a:spcAft>
+            </a:pPr>
+            <a:r>
+              <a:rPr b="1" sz="1200">
                 <a:solidFill>
                   <a:srgbClr val="1B365D"/>
                 </a:solidFill>
               </a:rPr>
-              <a:t>Feature Scaling (StandardScaler)</a:t>
+              <a:t>100% Success Orbits</a:t>
             </a:r>
           </a:p>
           <a:p>
             <a:pPr lvl="1">
               <a:spcAft>
-                <a:spcPts val="600"/>
-              </a:spcAft>
-            </a:pPr>
-            <a:r>
-              <a:rPr sz="1100">
+                <a:spcPts val="400"/>
+              </a:spcAft>
+            </a:pPr>
+            <a:r>
+              <a:rPr sz="1000">
                 <a:solidFill>
                   <a:srgbClr val="1E293B"/>
                 </a:solidFill>
               </a:rPr>
-              <a:t>Transformed the 80-feature matrix using StandardScaler (z = (x - mean)/std) to ensure scale-sensitive algorithms (SVM, KNN, Logistic Regression) converge without feature bias.</a:t>
+              <a:t>ES-L1, GEO, HEO, and SSO achieved 100% recovery rates. Sun-Synchronous and Earth-Moon Lagrange trajectories provide favorable booster separation geometries.</a:t>
             </a:r>
           </a:p>
           <a:p>
             <a:pPr>
               <a:spcBef>
-                <a:spcPts val="800"/>
+                <a:spcPts val="400"/>
               </a:spcBef>
               <a:spcAft>
-                <a:spcPts val="200"/>
-              </a:spcAft>
-            </a:pPr>
-            <a:r>
-              <a:rPr b="1" sz="1300">
+                <a:spcPts val="100"/>
+              </a:spcAft>
+            </a:pPr>
+            <a:r>
+              <a:rPr b="1" sz="1200">
                 <a:solidFill>
                   <a:srgbClr val="1B365D"/>
                 </a:solidFill>
               </a:rPr>
-              <a:t>Data Splitting</a:t>
+              <a:t>Moderate Success Orbits</a:t>
             </a:r>
           </a:p>
           <a:p>
             <a:pPr lvl="1">
               <a:spcAft>
-                <a:spcPts val="600"/>
-              </a:spcAft>
-            </a:pPr>
-            <a:r>
-              <a:rPr sz="1100">
+                <a:spcPts val="400"/>
+              </a:spcAft>
+            </a:pPr>
+            <a:r>
+              <a:rPr sz="1000">
                 <a:solidFill>
                   <a:srgbClr val="1E293B"/>
                 </a:solidFill>
               </a:rPr>
-              <a:t>Partitioned dataset using train_test_split(X, Y, test_size=0.2, random_state=2), yielding exactly 72 training samples and 18 test samples.</a:t>
+              <a:t>VLEO (~85%), LEO (~71%), and ISS missions (~62%) exhibited high recovery reliability.</a:t>
             </a:r>
           </a:p>
           <a:p>
             <a:pPr>
               <a:spcBef>
-                <a:spcPts val="800"/>
+                <a:spcPts val="400"/>
               </a:spcBef>
               <a:spcAft>
-                <a:spcPts val="200"/>
-              </a:spcAft>
-            </a:pPr>
-            <a:r>
-              <a:rPr b="1" sz="1300">
+                <a:spcPts val="100"/>
+              </a:spcAft>
+            </a:pPr>
+            <a:r>
+              <a:rPr b="1" sz="1200">
                 <a:solidFill>
                   <a:srgbClr val="1B365D"/>
                 </a:solidFill>
               </a:rPr>
-              <a:t>Cross-Validation &amp; Grid Search</a:t>
+              <a:t>Most Challenging Orbit (GTO)</a:t>
             </a:r>
           </a:p>
           <a:p>
             <a:pPr lvl="1">
               <a:spcAft>
-                <a:spcPts val="600"/>
-              </a:spcAft>
-            </a:pPr>
-            <a:r>
-              <a:rPr sz="1100">
+                <a:spcPts val="400"/>
+              </a:spcAft>
+            </a:pPr>
+            <a:r>
+              <a:rPr sz="1000">
                 <a:solidFill>
                   <a:srgbClr val="1E293B"/>
                 </a:solidFill>
               </a:rPr>
-              <a:t>Applied 10-fold cross-validation (cv=10) with GridSearchCV to tune hyperparameters: Logistic Regression (C, penalty, solver), SVM (kernel, C, gamma), Decision Tree (criterion, max_depth, splitter, min_samples_split), and KNN (n_neighbors, p, algorithm).</a:t>
+              <a:t>Geostationary Transfer Orbit (GTO) registered the lowest success rate (~52%). Boosters delivering GTO payloads experience extreme re-entry velocity and thermal stress.</a:t>
             </a:r>
           </a:p>
           <a:p>
             <a:pPr>
               <a:spcBef>
-                <a:spcPts val="800"/>
+                <a:spcPts val="400"/>
               </a:spcBef>
               <a:spcAft>
-                <a:spcPts val="200"/>
-              </a:spcAft>
-            </a:pPr>
-            <a:r>
-              <a:rPr b="1" sz="1300">
+                <a:spcPts val="100"/>
+              </a:spcAft>
+            </a:pPr>
+            <a:r>
+              <a:rPr b="1" sz="1200">
                 <a:solidFill>
                   <a:srgbClr val="1B365D"/>
                 </a:solidFill>
               </a:rPr>
-              <a:t>Code Repository</a:t>
+              <a:t>Lab Code URL</a:t>
             </a:r>
           </a:p>
           <a:p>
             <a:pPr lvl="1">
               <a:spcAft>
-                <a:spcPts val="600"/>
-              </a:spcAft>
-            </a:pPr>
-            <a:r>
-              <a:rPr sz="1100">
+                <a:spcPts val="400"/>
+              </a:spcAft>
+            </a:pPr>
+            <a:r>
+              <a:rPr sz="1000">
                 <a:solidFill>
                   <a:srgbClr val="1E293B"/>
                 </a:solidFill>
               </a:rPr>
-              <a:t>Full predictive notebook available at: https://github.com/alfaturachman/IBM-Applied-Data-Science-Capstone</a:t>
-            </a:r>
-          </a:p>
-        </p:txBody>
-      </p:sp>
+              <a:t>Visual Analytics Notebook: https://github.com/Alfaturachman/IBM-Applied-Data-Science-Capstone/blob/main/jupyter-labs-eda-dataviz-v2.ipynb</a:t>
+            </a:r>
+          </a:p>
+        </p:txBody>
+      </p:sp>
+      <p:pic>
+        <p:nvPicPr>
+          <p:cNvPr id="9" name="Picture 8" descr="eda_orbit.png"/>
+          <p:cNvPicPr>
+            <a:picLocks noChangeAspect="1"/>
+          </p:cNvPicPr>
+          <p:nvPr/>
+        </p:nvPicPr>
+        <p:blipFill>
+          <a:blip r:embed="rId2"/>
+          <a:stretch>
+            <a:fillRect/>
+          </a:stretch>
+        </p:blipFill>
+        <p:spPr>
+          <a:xfrm>
+            <a:off x="6949440" y="1188720"/>
+            <a:ext cx="4754880" cy="2377440"/>
+          </a:xfrm>
+          <a:prstGeom prst="rect">
+            <a:avLst/>
+          </a:prstGeom>
+        </p:spPr>
+      </p:pic>
     </p:spTree>
   </p:cSld>
   <p:clrMapOvr>
@@ -3938,27 +3904,63 @@
               </a:defRPr>
             </a:pPr>
             <a:r>
-              <a:t>EDA with Visualization Results</a:t>
+              <a:t>EDA with Visualization Results: Annual Success Progression Trend</a:t>
             </a:r>
           </a:p>
           <a:p>
             <a:pPr>
               <a:defRPr sz="1100">
                 <a:solidFill>
-                  <a:srgbClr val="E2E8F0"/>
+                  <a:srgbClr val="D4AF37"/>
                 </a:solidFill>
                 <a:latin typeface="Arial"/>
               </a:defRPr>
             </a:pPr>
             <a:r>
-              <a:t>Empirical Patterns Across Flight Numbers, Payload Classes, and Orbital Targets</a:t>
-            </a:r>
-          </a:p>
-        </p:txBody>
-      </p:sp>
-      <p:sp>
-        <p:nvSpPr>
-          <p:cNvPr id="5" name="Rectangle 4"/>
+              <a:t>Documenting SpaceX's 10-Year Rocket Recovery Learning Curve (2010 - 2020)</a:t>
+            </a:r>
+          </a:p>
+        </p:txBody>
+      </p:sp>
+      <p:sp>
+        <p:nvSpPr>
+          <p:cNvPr id="5" name="TextBox 4"/>
+          <p:cNvSpPr txBox="1"/>
+          <p:nvPr/>
+        </p:nvSpPr>
+        <p:spPr>
+          <a:xfrm>
+            <a:off x="8412480" y="137160"/>
+            <a:ext cx="3291840" cy="548640"/>
+          </a:xfrm>
+          <a:prstGeom prst="rect">
+            <a:avLst/>
+          </a:prstGeom>
+          <a:noFill/>
+        </p:spPr>
+        <p:txBody>
+          <a:bodyPr wrap="none">
+            <a:spAutoFit/>
+          </a:bodyPr>
+          <a:lstStyle/>
+          <a:p>
+            <a:pPr>
+              <a:defRPr sz="1100" b="1">
+                <a:solidFill>
+                  <a:srgbClr val="FFFFFF"/>
+                </a:solidFill>
+                <a:latin typeface="Arial"/>
+              </a:defRPr>
+            </a:pPr>
+            <a:r>
+              <a:t>IBM Applied Data Science Capstone</a:t>
+            </a:r>
+          </a:p>
+        </p:txBody>
+      </p:sp>
+      <p:sp>
+        <p:nvSpPr>
+          <p:cNvPr id="6" name="Rectangle 5"/>
           <p:cNvSpPr/>
           <p:nvPr/>
         </p:nvSpPr>
@@ -4003,13 +4005,13 @@
       </p:sp>
       <p:sp>
         <p:nvSpPr>
-          <p:cNvPr id="6" name="TextBox 5"/>
+          <p:cNvPr id="7" name="TextBox 6"/>
           <p:cNvSpPr txBox="1"/>
           <p:nvPr/>
         </p:nvSpPr>
         <p:spPr>
           <a:xfrm>
-            <a:off x="457200" y="6473952"/>
+            <a:off x="457200" y="6492240"/>
             <a:ext cx="11277295" cy="320040"/>
           </a:xfrm>
           <a:prstGeom prst="rect">
@@ -4024,7 +4026,7 @@
           <a:lstStyle/>
           <a:p>
             <a:pPr>
-              <a:defRPr sz="1000">
+              <a:defRPr sz="950">
                 <a:solidFill>
                   <a:srgbClr val="64748B"/>
                 </a:solidFill>
@@ -4032,21 +4034,21 @@
               </a:defRPr>
             </a:pPr>
             <a:r>
-              <a:t>IBM Applied Data Science Capstone | Learner: alfaturachman | GitHub: https://github.com/alfaturachman/IBM-Applied-Data-Science-Capstone</a:t>
-            </a:r>
-          </a:p>
-        </p:txBody>
-      </p:sp>
-      <p:sp>
-        <p:nvSpPr>
-          <p:cNvPr id="7" name="TextBox 6"/>
+              <a:t>SpaceX Falcon 9 Landing Prediction | Executive Portfolio Report | Learner: alfaturachman</a:t>
+            </a:r>
+          </a:p>
+        </p:txBody>
+      </p:sp>
+      <p:sp>
+        <p:nvSpPr>
+          <p:cNvPr id="8" name="TextBox 7"/>
           <p:cNvSpPr txBox="1"/>
           <p:nvPr/>
         </p:nvSpPr>
         <p:spPr>
           <a:xfrm>
-            <a:off x="548640" y="1051560"/>
-            <a:ext cx="6217920" cy="5212080"/>
+            <a:off x="548640" y="1005840"/>
+            <a:ext cx="6217920" cy="5303520"/>
           </a:xfrm>
           <a:prstGeom prst="rect">
             <a:avLst/>
@@ -4058,14 +4060,13 @@
             <a:spAutoFit/>
           </a:bodyPr>
           <a:lstStyle/>
-          <a:p/>
           <a:p>
             <a:pPr>
               <a:spcBef>
-                <a:spcPts val="600"/>
+                <a:spcPts val="0"/>
               </a:spcBef>
               <a:spcAft>
-                <a:spcPts val="200"/>
+                <a:spcPts val="100"/>
               </a:spcAft>
             </a:pPr>
             <a:r>
@@ -4074,7 +4075,7 @@
                   <a:srgbClr val="1B365D"/>
                 </a:solidFill>
               </a:rPr>
-              <a:t>Flight Number vs. Success</a:t>
+              <a:t>Inception Era (2010 - 2013)</a:t>
             </a:r>
           </a:p>
           <a:p>
@@ -4084,21 +4085,21 @@
               </a:spcAft>
             </a:pPr>
             <a:r>
-              <a:rPr sz="1050">
+              <a:rPr sz="1000">
                 <a:solidFill>
                   <a:srgbClr val="1E293B"/>
                 </a:solidFill>
               </a:rPr>
-              <a:t>Early flights (1-25) had high failure rates during initial rocket development. After flight #40, success rates consistently exceeded 80%.</a:t>
+              <a:t>0% recovery rate. Boosters were deliberately expended in the Atlantic Ocean to gather preliminary telemetry and aerodynamic data.</a:t>
             </a:r>
           </a:p>
           <a:p>
             <a:pPr>
               <a:spcBef>
-                <a:spcPts val="600"/>
+                <a:spcPts val="400"/>
               </a:spcBef>
               <a:spcAft>
-                <a:spcPts val="200"/>
+                <a:spcPts val="100"/>
               </a:spcAft>
             </a:pPr>
             <a:r>
@@ -4107,7 +4108,7 @@
                   <a:srgbClr val="1B365D"/>
                 </a:solidFill>
               </a:rPr>
-              <a:t>Payload Mass Impact</a:t>
+              <a:t>Experimental Recovery (2014 - 2016)</a:t>
             </a:r>
           </a:p>
           <a:p>
@@ -4117,21 +4118,21 @@
               </a:spcAft>
             </a:pPr>
             <a:r>
-              <a:rPr sz="1050">
+              <a:rPr sz="1000">
                 <a:solidFill>
                   <a:srgbClr val="1E293B"/>
                 </a:solidFill>
               </a:rPr>
-              <a:t>In the heavy payload range (&gt;8,000 kg), launches were primarily to LEO (e.g., Starlink) with near-perfect landing recovery rates.</a:t>
+              <a:t>Gradual progress from 33% to 60%. Achieved the first historic successful ground-pad landing (LZ-1) on Dec 22, 2015, and drone ship recovery on April 8, 2016.</a:t>
             </a:r>
           </a:p>
           <a:p>
             <a:pPr>
               <a:spcBef>
-                <a:spcPts val="600"/>
+                <a:spcPts val="400"/>
               </a:spcBef>
               <a:spcAft>
-                <a:spcPts val="200"/>
+                <a:spcPts val="100"/>
               </a:spcAft>
             </a:pPr>
             <a:r>
@@ -4140,7 +4141,7 @@
                   <a:srgbClr val="1B365D"/>
                 </a:solidFill>
               </a:rPr>
-              <a:t>Orbit-Specific Success Rates</a:t>
+              <a:t>Full Reusability Era (2017 - 2020)</a:t>
             </a:r>
           </a:p>
           <a:p>
@@ -4150,21 +4151,21 @@
               </a:spcAft>
             </a:pPr>
             <a:r>
-              <a:rPr sz="1050">
+              <a:rPr sz="1000">
                 <a:solidFill>
                   <a:srgbClr val="1E293B"/>
                 </a:solidFill>
               </a:rPr>
-              <a:t>100% Success: ES-L1, GEO, HEO, SSO. Moderate Success: VLEO (~85%), LEO (~71%), ISS (~62%). Challenging: GTO (~52%) due to severe re-entry thermal loads.</a:t>
+              <a:t>Success rate surged past 80%, reaching 84.6% by 2020. The introduction of Booster Block 5 in 2018 established industrial-grade reusability.</a:t>
             </a:r>
           </a:p>
           <a:p>
             <a:pPr>
               <a:spcBef>
-                <a:spcPts val="600"/>
+                <a:spcPts val="400"/>
               </a:spcBef>
               <a:spcAft>
-                <a:spcPts val="200"/>
+                <a:spcPts val="100"/>
               </a:spcAft>
             </a:pPr>
             <a:r>
@@ -4173,7 +4174,7 @@
                   <a:srgbClr val="1B365D"/>
                 </a:solidFill>
               </a:rPr>
-              <a:t>Annual Trend</a:t>
+              <a:t>Lab Code URL</a:t>
             </a:r>
           </a:p>
           <a:p>
@@ -4183,19 +4184,19 @@
               </a:spcAft>
             </a:pPr>
             <a:r>
-              <a:rPr sz="1050">
+              <a:rPr sz="1000">
                 <a:solidFill>
                   <a:srgbClr val="1E293B"/>
                 </a:solidFill>
               </a:rPr>
-              <a:t>Success rate progressed from 0% in 2010 to &gt;80% in 2020, demonstrating rapid hardware maturation.</a:t>
+              <a:t>Visual Analytics Notebook: https://github.com/Alfaturachman/IBM-Applied-Data-Science-Capstone/blob/main/jupyter-labs-eda-dataviz-v2.ipynb</a:t>
             </a:r>
           </a:p>
         </p:txBody>
       </p:sp>
       <p:pic>
         <p:nvPicPr>
-          <p:cNvPr id="8" name="Picture 7" descr="eda_orbit.png"/>
+          <p:cNvPr id="9" name="Picture 8" descr="eda_trend.png"/>
           <p:cNvPicPr>
             <a:picLocks noChangeAspect="1"/>
           </p:cNvPicPr>
@@ -4209,7 +4210,7 @@
         </p:blipFill>
         <p:spPr>
           <a:xfrm>
-            <a:off x="6949440" y="1280160"/>
+            <a:off x="6949440" y="1188720"/>
             <a:ext cx="4754880" cy="2377440"/>
           </a:xfrm>
           <a:prstGeom prst="rect">
@@ -4356,27 +4357,63 @@
               </a:defRPr>
             </a:pPr>
             <a:r>
-              <a:t>EDA with SQL Results</a:t>
+              <a:t>EDA with SQL Results: Quantitative Database Extraction Queries</a:t>
             </a:r>
           </a:p>
           <a:p>
             <a:pPr>
               <a:defRPr sz="1100">
                 <a:solidFill>
-                  <a:srgbClr val="E2E8F0"/>
+                  <a:srgbClr val="D4AF37"/>
                 </a:solidFill>
                 <a:latin typeface="Arial"/>
               </a:defRPr>
             </a:pPr>
             <a:r>
-              <a:t>Quantitative Database Extraction Findings on Launch Sites, Payloads, and Boosters</a:t>
-            </a:r>
-          </a:p>
-        </p:txBody>
-      </p:sp>
-      <p:sp>
-        <p:nvSpPr>
-          <p:cNvPr id="5" name="Rectangle 4"/>
+              <a:t>Explicit SQL Queries and Outputs Executed on SpaceX Database (my_data1.db)</a:t>
+            </a:r>
+          </a:p>
+        </p:txBody>
+      </p:sp>
+      <p:sp>
+        <p:nvSpPr>
+          <p:cNvPr id="5" name="TextBox 4"/>
+          <p:cNvSpPr txBox="1"/>
+          <p:nvPr/>
+        </p:nvSpPr>
+        <p:spPr>
+          <a:xfrm>
+            <a:off x="8412480" y="137160"/>
+            <a:ext cx="3291840" cy="548640"/>
+          </a:xfrm>
+          <a:prstGeom prst="rect">
+            <a:avLst/>
+          </a:prstGeom>
+          <a:noFill/>
+        </p:spPr>
+        <p:txBody>
+          <a:bodyPr wrap="none">
+            <a:spAutoFit/>
+          </a:bodyPr>
+          <a:lstStyle/>
+          <a:p>
+            <a:pPr>
+              <a:defRPr sz="1100" b="1">
+                <a:solidFill>
+                  <a:srgbClr val="FFFFFF"/>
+                </a:solidFill>
+                <a:latin typeface="Arial"/>
+              </a:defRPr>
+            </a:pPr>
+            <a:r>
+              <a:t>IBM Applied Data Science Capstone</a:t>
+            </a:r>
+          </a:p>
+        </p:txBody>
+      </p:sp>
+      <p:sp>
+        <p:nvSpPr>
+          <p:cNvPr id="6" name="Rectangle 5"/>
           <p:cNvSpPr/>
           <p:nvPr/>
         </p:nvSpPr>
@@ -4421,13 +4458,13 @@
       </p:sp>
       <p:sp>
         <p:nvSpPr>
-          <p:cNvPr id="6" name="TextBox 5"/>
+          <p:cNvPr id="7" name="TextBox 6"/>
           <p:cNvSpPr txBox="1"/>
           <p:nvPr/>
         </p:nvSpPr>
         <p:spPr>
           <a:xfrm>
-            <a:off x="457200" y="6473952"/>
+            <a:off x="457200" y="6492240"/>
             <a:ext cx="11277295" cy="320040"/>
           </a:xfrm>
           <a:prstGeom prst="rect">
@@ -4442,7 +4479,7 @@
           <a:lstStyle/>
           <a:p>
             <a:pPr>
-              <a:defRPr sz="1000">
+              <a:defRPr sz="950">
                 <a:solidFill>
                   <a:srgbClr val="64748B"/>
                 </a:solidFill>
@@ -4450,21 +4487,21 @@
               </a:defRPr>
             </a:pPr>
             <a:r>
-              <a:t>IBM Applied Data Science Capstone | Learner: alfaturachman | GitHub: https://github.com/alfaturachman/IBM-Applied-Data-Science-Capstone</a:t>
-            </a:r>
-          </a:p>
-        </p:txBody>
-      </p:sp>
-      <p:sp>
-        <p:nvSpPr>
-          <p:cNvPr id="7" name="TextBox 6"/>
+              <a:t>SpaceX Falcon 9 Landing Prediction | Executive Portfolio Report | Learner: alfaturachman</a:t>
+            </a:r>
+          </a:p>
+        </p:txBody>
+      </p:sp>
+      <p:sp>
+        <p:nvSpPr>
+          <p:cNvPr id="8" name="TextBox 7"/>
           <p:cNvSpPr txBox="1"/>
           <p:nvPr/>
         </p:nvSpPr>
         <p:spPr>
           <a:xfrm>
-            <a:off x="548640" y="1051560"/>
-            <a:ext cx="11094415" cy="5212080"/>
+            <a:off x="548640" y="1005840"/>
+            <a:ext cx="11094415" cy="5303520"/>
           </a:xfrm>
           <a:prstGeom prst="rect">
             <a:avLst/>
@@ -4476,203 +4513,334 @@
             <a:spAutoFit/>
           </a:bodyPr>
           <a:lstStyle/>
-          <a:p/>
           <a:p>
             <a:pPr>
               <a:spcBef>
-                <a:spcPts val="800"/>
+                <a:spcPts val="0"/>
               </a:spcBef>
               <a:spcAft>
-                <a:spcPts val="200"/>
-              </a:spcAft>
-            </a:pPr>
-            <a:r>
-              <a:rPr b="1" sz="1300">
+                <a:spcPts val="100"/>
+              </a:spcAft>
+            </a:pPr>
+            <a:r>
+              <a:rPr b="1" sz="1200">
                 <a:solidFill>
                   <a:srgbClr val="1B365D"/>
                 </a:solidFill>
               </a:rPr>
-              <a:t>Distinct Launch Sites</a:t>
+              <a:t>Task 1 - Unique Launch Sites</a:t>
             </a:r>
           </a:p>
           <a:p>
             <a:pPr lvl="1">
               <a:spcAft>
-                <a:spcPts val="600"/>
-              </a:spcAft>
-            </a:pPr>
-            <a:r>
-              <a:rPr sz="1100">
+                <a:spcPts val="400"/>
+              </a:spcAft>
+            </a:pPr>
+            <a:r>
+              <a:rPr sz="1050">
                 <a:solidFill>
                   <a:srgbClr val="1E293B"/>
                 </a:solidFill>
               </a:rPr>
-              <a:t>Exactly 4 launch sites identified: CCAFS LC-40, CCAFS SLC-40, KSC LC-39A, and VAFB SLC-4E.</a:t>
+              <a:t>SELECT DISTINCT Launch_Site FROM SPACEXTBL; -&gt; Outputs: CCAFS LC-40, CCAFS SLC-40, KSC LC-39A, VAFB SLC-4E.</a:t>
             </a:r>
           </a:p>
           <a:p>
             <a:pPr>
               <a:spcBef>
-                <a:spcPts val="800"/>
+                <a:spcPts val="400"/>
               </a:spcBef>
               <a:spcAft>
-                <a:spcPts val="200"/>
-              </a:spcAft>
-            </a:pPr>
-            <a:r>
-              <a:rPr b="1" sz="1300">
+                <a:spcPts val="100"/>
+              </a:spcAft>
+            </a:pPr>
+            <a:r>
+              <a:rPr b="1" sz="1200">
                 <a:solidFill>
                   <a:srgbClr val="1B365D"/>
                 </a:solidFill>
               </a:rPr>
-              <a:t>NASA Cumulative Payload</a:t>
+              <a:t>Task 2 - 5 Records Starting with 'CCA'</a:t>
             </a:r>
           </a:p>
           <a:p>
             <a:pPr lvl="1">
               <a:spcAft>
-                <a:spcPts val="600"/>
-              </a:spcAft>
-            </a:pPr>
-            <a:r>
-              <a:rPr sz="1100">
+                <a:spcPts val="400"/>
+              </a:spcAft>
+            </a:pPr>
+            <a:r>
+              <a:rPr sz="1050">
                 <a:solidFill>
                   <a:srgbClr val="1E293B"/>
                 </a:solidFill>
               </a:rPr>
-              <a:t>Total payload mass delivered for NASA (CRS) missions: 45,596 kg.</a:t>
+              <a:t>SELECT * FROM SPACEXTBL WHERE Launch_Site LIKE 'CCA%' LIMIT 5; -&gt; Successfully retrieved 5 Cape Canaveral launches.</a:t>
             </a:r>
           </a:p>
           <a:p>
             <a:pPr>
               <a:spcBef>
-                <a:spcPts val="800"/>
+                <a:spcPts val="400"/>
               </a:spcBef>
               <a:spcAft>
-                <a:spcPts val="200"/>
-              </a:spcAft>
-            </a:pPr>
-            <a:r>
-              <a:rPr b="1" sz="1300">
+                <a:spcPts val="100"/>
+              </a:spcAft>
+            </a:pPr>
+            <a:r>
+              <a:rPr b="1" sz="1200">
                 <a:solidFill>
                   <a:srgbClr val="1B365D"/>
                 </a:solidFill>
               </a:rPr>
-              <a:t>Average Successful Payload</a:t>
+              <a:t>Task 3 - NASA CRS Total Payload Mass</a:t>
             </a:r>
           </a:p>
           <a:p>
             <a:pPr lvl="1">
               <a:spcAft>
-                <a:spcPts val="600"/>
-              </a:spcAft>
-            </a:pPr>
-            <a:r>
-              <a:rPr sz="1100">
+                <a:spcPts val="400"/>
+              </a:spcAft>
+            </a:pPr>
+            <a:r>
+              <a:rPr sz="1050">
                 <a:solidFill>
                   <a:srgbClr val="1E293B"/>
                 </a:solidFill>
               </a:rPr>
-              <a:t>Average payload mass for successful landings: 5,408 kg.</a:t>
+              <a:t>SELECT SUM(PAYLOAD_MASS__KG_) FROM SPACEXTBL WHERE Customer='NASA (CRS)'; -&gt; Output: 45,596 kg.</a:t>
             </a:r>
           </a:p>
           <a:p>
             <a:pPr>
               <a:spcBef>
-                <a:spcPts val="800"/>
+                <a:spcPts val="400"/>
               </a:spcBef>
               <a:spcAft>
-                <a:spcPts val="200"/>
-              </a:spcAft>
-            </a:pPr>
-            <a:r>
-              <a:rPr b="1" sz="1300">
+                <a:spcPts val="100"/>
+              </a:spcAft>
+            </a:pPr>
+            <a:r>
+              <a:rPr b="1" sz="1200">
                 <a:solidFill>
                   <a:srgbClr val="1B365D"/>
                 </a:solidFill>
               </a:rPr>
-              <a:t>First Ground Pad Recovery</a:t>
+              <a:t>Task 4 - Average Payload Mass (F9 v1.1)</a:t>
             </a:r>
           </a:p>
           <a:p>
             <a:pPr lvl="1">
               <a:spcAft>
-                <a:spcPts val="600"/>
-              </a:spcAft>
-            </a:pPr>
-            <a:r>
-              <a:rPr sz="1100">
+                <a:spcPts val="400"/>
+              </a:spcAft>
+            </a:pPr>
+            <a:r>
+              <a:rPr sz="1050">
                 <a:solidFill>
                   <a:srgbClr val="1E293B"/>
                 </a:solidFill>
               </a:rPr>
-              <a:t>Earliest successful ground landing occurred on 2015-12-22 (Booster B1019 at LZ-1).</a:t>
+              <a:t>SELECT AVG(PAYLOAD_MASS__KG_) FROM SPACEXTBL WHERE Booster_Version LIKE 'F9 v1.1%'; -&gt; Output: 2,928.4 kg.</a:t>
             </a:r>
           </a:p>
           <a:p>
             <a:pPr>
               <a:spcBef>
-                <a:spcPts val="800"/>
+                <a:spcPts val="400"/>
               </a:spcBef>
               <a:spcAft>
-                <a:spcPts val="200"/>
-              </a:spcAft>
-            </a:pPr>
-            <a:r>
-              <a:rPr b="1" sz="1300">
+                <a:spcPts val="100"/>
+              </a:spcAft>
+            </a:pPr>
+            <a:r>
+              <a:rPr b="1" sz="1200">
                 <a:solidFill>
                   <a:srgbClr val="1B365D"/>
                 </a:solidFill>
               </a:rPr>
-              <a:t>Successful Drone Ship Boosters (4,000 - 6,000 kg)</a:t>
+              <a:t>Task 5 - First Ground Pad Success Date</a:t>
             </a:r>
           </a:p>
           <a:p>
             <a:pPr lvl="1">
               <a:spcAft>
-                <a:spcPts val="600"/>
-              </a:spcAft>
-            </a:pPr>
-            <a:r>
-              <a:rPr sz="1100">
+                <a:spcPts val="400"/>
+              </a:spcAft>
+            </a:pPr>
+            <a:r>
+              <a:rPr sz="1050">
                 <a:solidFill>
                   <a:srgbClr val="1E293B"/>
                 </a:solidFill>
               </a:rPr>
-              <a:t>Boosters B1022.1, B1026.1, B1021.2, and B1031.2 successfully landed on drone ships within this payload bracket.</a:t>
+              <a:t>SELECT MIN(Date) FROM SPACEXTBL WHERE Landing_Outcome='Success (ground pad)'; -&gt; Output: 2015-12-22 (Booster B1019 at LZ-1).</a:t>
             </a:r>
           </a:p>
           <a:p>
             <a:pPr>
               <a:spcBef>
-                <a:spcPts val="800"/>
+                <a:spcPts val="400"/>
               </a:spcBef>
               <a:spcAft>
-                <a:spcPts val="200"/>
-              </a:spcAft>
-            </a:pPr>
-            <a:r>
-              <a:rPr b="1" sz="1300">
+                <a:spcPts val="100"/>
+              </a:spcAft>
+            </a:pPr>
+            <a:r>
+              <a:rPr b="1" sz="1200">
                 <a:solidFill>
                   <a:srgbClr val="1B365D"/>
                 </a:solidFill>
               </a:rPr>
-              <a:t>Maximum Payload Boosters</a:t>
+              <a:t>Task 6 - Drone Ship Boosters (4,000-6,000 kg)</a:t>
             </a:r>
           </a:p>
           <a:p>
             <a:pPr lvl="1">
               <a:spcAft>
-                <a:spcPts val="600"/>
-              </a:spcAft>
-            </a:pPr>
-            <a:r>
-              <a:rPr sz="1100">
+                <a:spcPts val="400"/>
+              </a:spcAft>
+            </a:pPr>
+            <a:r>
+              <a:rPr sz="1050">
                 <a:solidFill>
                   <a:srgbClr val="1E293B"/>
                 </a:solidFill>
               </a:rPr>
-              <a:t>Maximum payload mass: 15,600 kg (delivered by Block 5 boosters B1048.4, B1049.4, B1051.3, B1056.4 for Starlink missions).</a:t>
+              <a:t>SELECT Booster_Version FROM SPACEXTBL WHERE Landing_Outcome='Success (drone ship)' AND PAYLOAD_MASS__KG_ BETWEEN 4000 AND 6000; -&gt; Output: B1022, B1026, B1031.1.</a:t>
+            </a:r>
+          </a:p>
+          <a:p>
+            <a:pPr>
+              <a:spcBef>
+                <a:spcPts val="400"/>
+              </a:spcBef>
+              <a:spcAft>
+                <a:spcPts val="100"/>
+              </a:spcAft>
+            </a:pPr>
+            <a:r>
+              <a:rPr b="1" sz="1200">
+                <a:solidFill>
+                  <a:srgbClr val="1B365D"/>
+                </a:solidFill>
+              </a:rPr>
+              <a:t>Task 7 - Total Mission Outcomes</a:t>
+            </a:r>
+          </a:p>
+          <a:p>
+            <a:pPr lvl="1">
+              <a:spcAft>
+                <a:spcPts val="400"/>
+              </a:spcAft>
+            </a:pPr>
+            <a:r>
+              <a:rPr sz="1050">
+                <a:solidFill>
+                  <a:srgbClr val="1E293B"/>
+                </a:solidFill>
+              </a:rPr>
+              <a:t>SELECT Mission_Outcome, COUNT(*) FROM SPACEXTBL GROUP BY Mission_Outcome; -&gt; Success: 98, Failure (in flight): 1, Success (payload status): 1.</a:t>
+            </a:r>
+          </a:p>
+          <a:p>
+            <a:pPr>
+              <a:spcBef>
+                <a:spcPts val="400"/>
+              </a:spcBef>
+              <a:spcAft>
+                <a:spcPts val="100"/>
+              </a:spcAft>
+            </a:pPr>
+            <a:r>
+              <a:rPr b="1" sz="1200">
+                <a:solidFill>
+                  <a:srgbClr val="1B365D"/>
+                </a:solidFill>
+              </a:rPr>
+              <a:t>Task 8 - Boosters with Max Payload</a:t>
+            </a:r>
+          </a:p>
+          <a:p>
+            <a:pPr lvl="1">
+              <a:spcAft>
+                <a:spcPts val="400"/>
+              </a:spcAft>
+            </a:pPr>
+            <a:r>
+              <a:rPr sz="1050">
+                <a:solidFill>
+                  <a:srgbClr val="1E293B"/>
+                </a:solidFill>
+              </a:rPr>
+              <a:t>SELECT Booster_Version FROM SPACEXTBL WHERE PAYLOAD_MASS__KG_ = (SELECT MAX(PAYLOAD_MASS__KG_) FROM SPACEXTBL); -&gt; Output: B1048.4, B1049.4, B1051.3, B1056.4, B1058.3, B1060.2 (15,600 kg Starlink flights).</a:t>
+            </a:r>
+          </a:p>
+          <a:p>
+            <a:pPr>
+              <a:spcBef>
+                <a:spcPts val="400"/>
+              </a:spcBef>
+              <a:spcAft>
+                <a:spcPts val="100"/>
+              </a:spcAft>
+            </a:pPr>
+            <a:r>
+              <a:rPr b="1" sz="1200">
+                <a:solidFill>
+                  <a:srgbClr val="1B365D"/>
+                </a:solidFill>
+              </a:rPr>
+              <a:t>Task 9 &amp; 10 - Monthly 2015 Drone Ship Failures &amp; Outcome Ranking</a:t>
+            </a:r>
+          </a:p>
+          <a:p>
+            <a:pPr lvl="1">
+              <a:spcAft>
+                <a:spcPts val="400"/>
+              </a:spcAft>
+            </a:pPr>
+            <a:r>
+              <a:rPr sz="1050">
+                <a:solidFill>
+                  <a:srgbClr val="1E293B"/>
+                </a:solidFill>
+              </a:rPr>
+              <a:t>Retrieved Jan-Dec 2015 failure events and ranked all landing outcomes descending by count between 2010-06-04 and 2017-03-20.</a:t>
+            </a:r>
+          </a:p>
+          <a:p>
+            <a:pPr>
+              <a:spcBef>
+                <a:spcPts val="400"/>
+              </a:spcBef>
+              <a:spcAft>
+                <a:spcPts val="100"/>
+              </a:spcAft>
+            </a:pPr>
+            <a:r>
+              <a:rPr b="1" sz="1200">
+                <a:solidFill>
+                  <a:srgbClr val="1B365D"/>
+                </a:solidFill>
+              </a:rPr>
+              <a:t>Lab Code URL</a:t>
+            </a:r>
+          </a:p>
+          <a:p>
+            <a:pPr lvl="1">
+              <a:spcAft>
+                <a:spcPts val="400"/>
+              </a:spcAft>
+            </a:pPr>
+            <a:r>
+              <a:rPr sz="1050">
+                <a:solidFill>
+                  <a:srgbClr val="1E293B"/>
+                </a:solidFill>
+              </a:rPr>
+              <a:t>Dedicated SQL Notebook &amp; SQLite Database: https://github.com/Alfaturachman/IBM-Applied-Data-Science-Capstone/blob/main/jupyter-labs-eda-sql-coursera_sqllite.ipynb</a:t>
             </a:r>
           </a:p>
         </p:txBody>
@@ -4816,27 +4984,63 @@
               </a:defRPr>
             </a:pPr>
             <a:r>
-              <a:t>Interactive Map Results using Folium</a:t>
+              <a:t>Interactive Map Results using Folium: Geospatial Proximity to Infrastructure</a:t>
             </a:r>
           </a:p>
           <a:p>
             <a:pPr>
               <a:defRPr sz="1100">
                 <a:solidFill>
-                  <a:srgbClr val="E2E8F0"/>
+                  <a:srgbClr val="D4AF37"/>
                 </a:solidFill>
                 <a:latin typeface="Arial"/>
               </a:defRPr>
             </a:pPr>
             <a:r>
-              <a:t>Geospatial Distribution, Outcome Clustering, and Infrastructure Proximity Analysis</a:t>
-            </a:r>
-          </a:p>
-        </p:txBody>
-      </p:sp>
-      <p:sp>
-        <p:nvSpPr>
-          <p:cNvPr id="5" name="Rectangle 4"/>
+              <a:t>Spatial Clustering &amp; Haversine Distance Analysis on Strategic Facilities</a:t>
+            </a:r>
+          </a:p>
+        </p:txBody>
+      </p:sp>
+      <p:sp>
+        <p:nvSpPr>
+          <p:cNvPr id="5" name="TextBox 4"/>
+          <p:cNvSpPr txBox="1"/>
+          <p:nvPr/>
+        </p:nvSpPr>
+        <p:spPr>
+          <a:xfrm>
+            <a:off x="8412480" y="137160"/>
+            <a:ext cx="3291840" cy="548640"/>
+          </a:xfrm>
+          <a:prstGeom prst="rect">
+            <a:avLst/>
+          </a:prstGeom>
+          <a:noFill/>
+        </p:spPr>
+        <p:txBody>
+          <a:bodyPr wrap="none">
+            <a:spAutoFit/>
+          </a:bodyPr>
+          <a:lstStyle/>
+          <a:p>
+            <a:pPr>
+              <a:defRPr sz="1100" b="1">
+                <a:solidFill>
+                  <a:srgbClr val="FFFFFF"/>
+                </a:solidFill>
+                <a:latin typeface="Arial"/>
+              </a:defRPr>
+            </a:pPr>
+            <a:r>
+              <a:t>IBM Applied Data Science Capstone</a:t>
+            </a:r>
+          </a:p>
+        </p:txBody>
+      </p:sp>
+      <p:sp>
+        <p:nvSpPr>
+          <p:cNvPr id="6" name="Rectangle 5"/>
           <p:cNvSpPr/>
           <p:nvPr/>
         </p:nvSpPr>
@@ -4881,13 +5085,13 @@
       </p:sp>
       <p:sp>
         <p:nvSpPr>
-          <p:cNvPr id="6" name="TextBox 5"/>
+          <p:cNvPr id="7" name="TextBox 6"/>
           <p:cNvSpPr txBox="1"/>
           <p:nvPr/>
         </p:nvSpPr>
         <p:spPr>
           <a:xfrm>
-            <a:off x="457200" y="6473952"/>
+            <a:off x="457200" y="6492240"/>
             <a:ext cx="11277295" cy="320040"/>
           </a:xfrm>
           <a:prstGeom prst="rect">
@@ -4902,7 +5106,7 @@
           <a:lstStyle/>
           <a:p>
             <a:pPr>
-              <a:defRPr sz="1000">
+              <a:defRPr sz="950">
                 <a:solidFill>
                   <a:srgbClr val="64748B"/>
                 </a:solidFill>
@@ -4910,21 +5114,21 @@
               </a:defRPr>
             </a:pPr>
             <a:r>
-              <a:t>IBM Applied Data Science Capstone | Learner: alfaturachman | GitHub: https://github.com/alfaturachman/IBM-Applied-Data-Science-Capstone</a:t>
-            </a:r>
-          </a:p>
-        </p:txBody>
-      </p:sp>
-      <p:sp>
-        <p:nvSpPr>
-          <p:cNvPr id="7" name="TextBox 6"/>
+              <a:t>SpaceX Falcon 9 Landing Prediction | Executive Portfolio Report | Learner: alfaturachman</a:t>
+            </a:r>
+          </a:p>
+        </p:txBody>
+      </p:sp>
+      <p:sp>
+        <p:nvSpPr>
+          <p:cNvPr id="8" name="TextBox 7"/>
           <p:cNvSpPr txBox="1"/>
           <p:nvPr/>
         </p:nvSpPr>
         <p:spPr>
           <a:xfrm>
-            <a:off x="548640" y="1051560"/>
-            <a:ext cx="6217920" cy="5212080"/>
+            <a:off x="548640" y="1005840"/>
+            <a:ext cx="6217920" cy="5303520"/>
           </a:xfrm>
           <a:prstGeom prst="rect">
             <a:avLst/>
@@ -4936,14 +5140,13 @@
             <a:spAutoFit/>
           </a:bodyPr>
           <a:lstStyle/>
-          <a:p/>
           <a:p>
             <a:pPr>
               <a:spcBef>
-                <a:spcPts val="600"/>
+                <a:spcPts val="0"/>
               </a:spcBef>
               <a:spcAft>
-                <a:spcPts val="200"/>
+                <a:spcPts val="100"/>
               </a:spcAft>
             </a:pPr>
             <a:r>
@@ -4952,7 +5155,7 @@
                   <a:srgbClr val="1B365D"/>
                 </a:solidFill>
               </a:rPr>
-              <a:t>Coastal Placement Strategy</a:t>
+              <a:t>Launch Site Coordinates</a:t>
             </a:r>
           </a:p>
           <a:p>
@@ -4962,21 +5165,21 @@
               </a:spcAft>
             </a:pPr>
             <a:r>
-              <a:rPr sz="1050">
+              <a:rPr sz="1000">
                 <a:solidFill>
                   <a:srgbClr val="1E293B"/>
                 </a:solidFill>
               </a:rPr>
-              <a:t>All launch sites are positioned directly on coastlines (Florida Atlantic coast, California Pacific coast) to ensure launch trajectories fly over water, minimizing public hazard.</a:t>
+              <a:t>CCAFS LC-40: 28.5623 N, 80.5774 W; CCAFS SLC-40: 28.5632 N, 80.5768 W; KSC LC-39A: 28.5733 N, 80.6469 W; VAFB SLC-4E: 34.6328 N, 120.6107 W.</a:t>
             </a:r>
           </a:p>
           <a:p>
             <a:pPr>
               <a:spcBef>
-                <a:spcPts val="600"/>
+                <a:spcPts val="400"/>
               </a:spcBef>
               <a:spcAft>
-                <a:spcPts val="200"/>
+                <a:spcPts val="100"/>
               </a:spcAft>
             </a:pPr>
             <a:r>
@@ -4985,7 +5188,7 @@
                   <a:srgbClr val="1B365D"/>
                 </a:solidFill>
               </a:rPr>
-              <a:t>Proximity Analysis for CCAFS SLC-40</a:t>
+              <a:t>MarkerCluster Visual Analytics</a:t>
             </a:r>
           </a:p>
           <a:p>
@@ -4995,24 +5198,21 @@
               </a:spcAft>
             </a:pPr>
             <a:r>
-              <a:rPr sz="1050">
+              <a:rPr sz="1000">
                 <a:solidFill>
                   <a:srgbClr val="1E293B"/>
                 </a:solidFill>
               </a:rPr>
-              <a:t>Distance to Coastline: 0.90 km (direct ocean buffer).
-Distance to Highway: 0.58 km (oversize rocket stage transport).
-Distance to Railway: 1.28 km (heavy propellant and hardware delivery).
-Distance to Nearest City (Titusville): 23.19 km (ensures safe perimeter &gt;20 km).</a:t>
+              <a:t>Grouped 90 launches into color-coded clusters (Green = Success, Red = Failure). Clusters immediately reveal higher concentration of green markers at KSC LC-39A.</a:t>
             </a:r>
           </a:p>
           <a:p>
             <a:pPr>
               <a:spcBef>
-                <a:spcPts val="600"/>
+                <a:spcPts val="400"/>
               </a:spcBef>
               <a:spcAft>
-                <a:spcPts val="200"/>
+                <a:spcPts val="100"/>
               </a:spcAft>
             </a:pPr>
             <a:r>
@@ -5021,7 +5221,7 @@
                   <a:srgbClr val="1B365D"/>
                 </a:solidFill>
               </a:rPr>
-              <a:t>Marker Clustering</a:t>
+              <a:t>Haversine Proximity (CCAFS SLC-40)</a:t>
             </a:r>
           </a:p>
           <a:p>
@@ -5031,19 +5231,85 @@
               </a:spcAft>
             </a:pPr>
             <a:r>
-              <a:rPr sz="1050">
+              <a:rPr sz="1000">
                 <a:solidFill>
                   <a:srgbClr val="1E293B"/>
                 </a:solidFill>
               </a:rPr>
-              <a:t>MarkerCluster visualizes high success density at KSC LC-39A compared to older Cape Canaveral pads.</a:t>
+              <a:t>Coastline: 0.90 km (flight over water for safety); Highway: 0.58 km (heavy equipment transit); Railway: 1.28 km (rocket stage logistics); City (Titusville): 23.19 km (residential safety buffer).</a:t>
+            </a:r>
+          </a:p>
+          <a:p>
+            <a:pPr>
+              <a:spcBef>
+                <a:spcPts val="400"/>
+              </a:spcBef>
+              <a:spcAft>
+                <a:spcPts val="100"/>
+              </a:spcAft>
+            </a:pPr>
+            <a:r>
+              <a:rPr b="1" sz="1200">
+                <a:solidFill>
+                  <a:srgbClr val="1B365D"/>
+                </a:solidFill>
+              </a:rPr>
+              <a:t>Strategic Design Logic</a:t>
+            </a:r>
+          </a:p>
+          <a:p>
+            <a:pPr lvl="1">
+              <a:spcAft>
+                <a:spcPts val="400"/>
+              </a:spcAft>
+            </a:pPr>
+            <a:r>
+              <a:rPr sz="1000">
+                <a:solidFill>
+                  <a:srgbClr val="1E293B"/>
+                </a:solidFill>
+              </a:rPr>
+              <a:t>Launch sites are uniformly placed on coastlines adjacent to logistics infrastructure while maintaining &gt;20 km separation from populated cities.</a:t>
+            </a:r>
+          </a:p>
+          <a:p>
+            <a:pPr>
+              <a:spcBef>
+                <a:spcPts val="400"/>
+              </a:spcBef>
+              <a:spcAft>
+                <a:spcPts val="100"/>
+              </a:spcAft>
+            </a:pPr>
+            <a:r>
+              <a:rPr b="1" sz="1200">
+                <a:solidFill>
+                  <a:srgbClr val="1B365D"/>
+                </a:solidFill>
+              </a:rPr>
+              <a:t>Lab Code URL</a:t>
+            </a:r>
+          </a:p>
+          <a:p>
+            <a:pPr lvl="1">
+              <a:spcAft>
+                <a:spcPts val="400"/>
+              </a:spcAft>
+            </a:pPr>
+            <a:r>
+              <a:rPr sz="1000">
+                <a:solidFill>
+                  <a:srgbClr val="1E293B"/>
+                </a:solidFill>
+              </a:rPr>
+              <a:t>Dedicated Folium Notebook: https://github.com/Alfaturachman/IBM-Applied-Data-Science-Capstone/blob/main/lab-jupyter-launch-site-location-v2.ipynb</a:t>
             </a:r>
           </a:p>
         </p:txBody>
       </p:sp>
       <p:pic>
         <p:nvPicPr>
-          <p:cNvPr id="8" name="Picture 7" descr="folium_proximity.png"/>
+          <p:cNvPr id="9" name="Picture 8" descr="folium_proximity.png"/>
           <p:cNvPicPr>
             <a:picLocks noChangeAspect="1"/>
           </p:cNvPicPr>
@@ -5057,7 +5323,7 @@
         </p:blipFill>
         <p:spPr>
           <a:xfrm>
-            <a:off x="6949440" y="1280160"/>
+            <a:off x="6949440" y="1188720"/>
             <a:ext cx="4754880" cy="2349470"/>
           </a:xfrm>
           <a:prstGeom prst="rect">
@@ -5204,27 +5470,63 @@
               </a:defRPr>
             </a:pPr>
             <a:r>
-              <a:t>Plotly Dash Dashboard Results</a:t>
+              <a:t>Plotly Dash Interactive Dashboard Results: Launch Site Performance &amp; Payload Analysis</a:t>
             </a:r>
           </a:p>
           <a:p>
             <a:pPr>
               <a:defRPr sz="1100">
                 <a:solidFill>
-                  <a:srgbClr val="E2E8F0"/>
+                  <a:srgbClr val="D4AF37"/>
                 </a:solidFill>
                 <a:latin typeface="Arial"/>
               </a:defRPr>
             </a:pPr>
             <a:r>
-              <a:t>Dynamic Success Proportions, Launch Site Superiority, and Payload Thresholds</a:t>
-            </a:r>
-          </a:p>
-        </p:txBody>
-      </p:sp>
-      <p:sp>
-        <p:nvSpPr>
-          <p:cNvPr id="5" name="Rectangle 4"/>
+              <a:t>Business Answers Derived from Dynamic Dropdown &amp; RangeSlider Controls</a:t>
+            </a:r>
+          </a:p>
+        </p:txBody>
+      </p:sp>
+      <p:sp>
+        <p:nvSpPr>
+          <p:cNvPr id="5" name="TextBox 4"/>
+          <p:cNvSpPr txBox="1"/>
+          <p:nvPr/>
+        </p:nvSpPr>
+        <p:spPr>
+          <a:xfrm>
+            <a:off x="8412480" y="137160"/>
+            <a:ext cx="3291840" cy="548640"/>
+          </a:xfrm>
+          <a:prstGeom prst="rect">
+            <a:avLst/>
+          </a:prstGeom>
+          <a:noFill/>
+        </p:spPr>
+        <p:txBody>
+          <a:bodyPr wrap="none">
+            <a:spAutoFit/>
+          </a:bodyPr>
+          <a:lstStyle/>
+          <a:p>
+            <a:pPr>
+              <a:defRPr sz="1100" b="1">
+                <a:solidFill>
+                  <a:srgbClr val="FFFFFF"/>
+                </a:solidFill>
+                <a:latin typeface="Arial"/>
+              </a:defRPr>
+            </a:pPr>
+            <a:r>
+              <a:t>IBM Applied Data Science Capstone</a:t>
+            </a:r>
+          </a:p>
+        </p:txBody>
+      </p:sp>
+      <p:sp>
+        <p:nvSpPr>
+          <p:cNvPr id="6" name="Rectangle 5"/>
           <p:cNvSpPr/>
           <p:nvPr/>
         </p:nvSpPr>
@@ -5269,13 +5571,13 @@
       </p:sp>
       <p:sp>
         <p:nvSpPr>
-          <p:cNvPr id="6" name="TextBox 5"/>
+          <p:cNvPr id="7" name="TextBox 6"/>
           <p:cNvSpPr txBox="1"/>
           <p:nvPr/>
         </p:nvSpPr>
         <p:spPr>
           <a:xfrm>
-            <a:off x="457200" y="6473952"/>
+            <a:off x="457200" y="6492240"/>
             <a:ext cx="11277295" cy="320040"/>
           </a:xfrm>
           <a:prstGeom prst="rect">
@@ -5290,7 +5592,7 @@
           <a:lstStyle/>
           <a:p>
             <a:pPr>
-              <a:defRPr sz="1000">
+              <a:defRPr sz="950">
                 <a:solidFill>
                   <a:srgbClr val="64748B"/>
                 </a:solidFill>
@@ -5298,21 +5600,21 @@
               </a:defRPr>
             </a:pPr>
             <a:r>
-              <a:t>IBM Applied Data Science Capstone | Learner: alfaturachman | GitHub: https://github.com/alfaturachman/IBM-Applied-Data-Science-Capstone</a:t>
-            </a:r>
-          </a:p>
-        </p:txBody>
-      </p:sp>
-      <p:sp>
-        <p:nvSpPr>
-          <p:cNvPr id="7" name="TextBox 6"/>
+              <a:t>SpaceX Falcon 9 Landing Prediction | Executive Portfolio Report | Learner: alfaturachman</a:t>
+            </a:r>
+          </a:p>
+        </p:txBody>
+      </p:sp>
+      <p:sp>
+        <p:nvSpPr>
+          <p:cNvPr id="8" name="TextBox 7"/>
           <p:cNvSpPr txBox="1"/>
           <p:nvPr/>
         </p:nvSpPr>
         <p:spPr>
           <a:xfrm>
-            <a:off x="548640" y="1051560"/>
-            <a:ext cx="6217920" cy="5212080"/>
+            <a:off x="548640" y="1005840"/>
+            <a:ext cx="6217920" cy="5303520"/>
           </a:xfrm>
           <a:prstGeom prst="rect">
             <a:avLst/>
@@ -5324,14 +5626,13 @@
             <a:spAutoFit/>
           </a:bodyPr>
           <a:lstStyle/>
-          <a:p/>
           <a:p>
             <a:pPr>
               <a:spcBef>
-                <a:spcPts val="600"/>
+                <a:spcPts val="0"/>
               </a:spcBef>
               <a:spcAft>
-                <a:spcPts val="200"/>
+                <a:spcPts val="100"/>
               </a:spcAft>
             </a:pPr>
             <a:r>
@@ -5340,7 +5641,7 @@
                   <a:srgbClr val="1B365D"/>
                 </a:solidFill>
               </a:rPr>
-              <a:t>Most Successful Launch Site</a:t>
+              <a:t>Q1 &amp; Q2 - Highest Success Launch Site</a:t>
             </a:r>
           </a:p>
           <a:p>
@@ -5350,21 +5651,21 @@
               </a:spcAft>
             </a:pPr>
             <a:r>
-              <a:rPr sz="1050">
+              <a:rPr sz="1000">
                 <a:solidFill>
                   <a:srgbClr val="1E293B"/>
                 </a:solidFill>
               </a:rPr>
-              <a:t>KSC LC-39A leads with 10 successful landings (41.7% of all successes) and the highest overall success rate of 76.92%.</a:t>
+              <a:t>KSC LC-39A is the top-performing facility: 10 successful landings (41.7% of all recoveries) with the highest success rate of 76.92% (10/13).</a:t>
             </a:r>
           </a:p>
           <a:p>
             <a:pPr>
               <a:spcBef>
-                <a:spcPts val="600"/>
+                <a:spcPts val="400"/>
               </a:spcBef>
               <a:spcAft>
-                <a:spcPts val="200"/>
+                <a:spcPts val="100"/>
               </a:spcAft>
             </a:pPr>
             <a:r>
@@ -5373,7 +5674,7 @@
                   <a:srgbClr val="1B365D"/>
                 </a:solidFill>
               </a:rPr>
-              <a:t>Site Ranking by Success Rate</a:t>
+              <a:t>Q3 - Optimal Payload Mass Range</a:t>
             </a:r>
           </a:p>
           <a:p>
@@ -5383,21 +5684,21 @@
               </a:spcAft>
             </a:pPr>
             <a:r>
-              <a:rPr sz="1050">
+              <a:rPr sz="1000">
                 <a:solidFill>
                   <a:srgbClr val="1E293B"/>
                 </a:solidFill>
               </a:rPr>
-              <a:t>KSC LC-39A (76.92%) &gt; CCAFS SLC-40 (42.86%) &gt; VAFB SLC-4E (40.00%) &gt; CCAFS LC-40 (26.92%).</a:t>
+              <a:t>Payloads between 2,000 kg and 4,000 kg achieved the highest landing success rate of 72.7% (8/11 missions succeeded).</a:t>
             </a:r>
           </a:p>
           <a:p>
             <a:pPr>
               <a:spcBef>
-                <a:spcPts val="600"/>
+                <a:spcPts val="400"/>
               </a:spcBef>
               <a:spcAft>
-                <a:spcPts val="200"/>
+                <a:spcPts val="100"/>
               </a:spcAft>
             </a:pPr>
             <a:r>
@@ -5406,7 +5707,7 @@
                   <a:srgbClr val="1B365D"/>
                 </a:solidFill>
               </a:rPr>
-              <a:t>Payload Sweet Spot</a:t>
+              <a:t>Q4 - Highest Risk Payload Range</a:t>
             </a:r>
           </a:p>
           <a:p>
@@ -5416,21 +5717,21 @@
               </a:spcAft>
             </a:pPr>
             <a:r>
-              <a:rPr sz="1050">
+              <a:rPr sz="1000">
                 <a:solidFill>
                   <a:srgbClr val="1E293B"/>
                 </a:solidFill>
               </a:rPr>
-              <a:t>Payloads between 2,000 kg and 4,000 kg recorded the highest success rate at 72.7%.</a:t>
+              <a:t>Payloads between 6,000 kg and 8,000 kg experienced the lowest success rate of 0% (0/4 missions succeeded, all lost at sea).</a:t>
             </a:r>
           </a:p>
           <a:p>
             <a:pPr>
               <a:spcBef>
-                <a:spcPts val="600"/>
+                <a:spcPts val="400"/>
               </a:spcBef>
               <a:spcAft>
-                <a:spcPts val="200"/>
+                <a:spcPts val="100"/>
               </a:spcAft>
             </a:pPr>
             <a:r>
@@ -5439,7 +5740,7 @@
                   <a:srgbClr val="1B365D"/>
                 </a:solidFill>
               </a:rPr>
-              <a:t>Most Vulnerable Payload Range</a:t>
+              <a:t>Q5 - FT Booster Version Reliability</a:t>
             </a:r>
           </a:p>
           <a:p>
@@ -5449,21 +5750,21 @@
               </a:spcAft>
             </a:pPr>
             <a:r>
-              <a:rPr sz="1050">
+              <a:rPr sz="1000">
                 <a:solidFill>
                   <a:srgbClr val="1E293B"/>
                 </a:solidFill>
               </a:rPr>
-              <a:t>Payloads between 6,000 kg and 8,000 kg recorded a 0% landing success rate (0 of 4 launches succeeded).</a:t>
+              <a:t>Booster Version Block 5 (v1.2 B1049-B1062) achieved 100% landing success across all payload ranges and orbits.</a:t>
             </a:r>
           </a:p>
           <a:p>
             <a:pPr>
               <a:spcBef>
-                <a:spcPts val="600"/>
+                <a:spcPts val="400"/>
               </a:spcBef>
               <a:spcAft>
-                <a:spcPts val="200"/>
+                <a:spcPts val="100"/>
               </a:spcAft>
             </a:pPr>
             <a:r>
@@ -5472,7 +5773,7 @@
                   <a:srgbClr val="1B365D"/>
                 </a:solidFill>
               </a:rPr>
-              <a:t>Booster Evolution</a:t>
+              <a:t>Application Script URL</a:t>
             </a:r>
           </a:p>
           <a:p>
@@ -5482,19 +5783,19 @@
               </a:spcAft>
             </a:pPr>
             <a:r>
-              <a:rPr sz="1050">
+              <a:rPr sz="1000">
                 <a:solidFill>
                   <a:srgbClr val="1E293B"/>
                 </a:solidFill>
               </a:rPr>
-              <a:t>Booster Block 5 (B5) achieved a 100% success rate, proving the reliability of reusable heat shielding.</a:t>
+              <a:t>Interactive Web Application Script: https://github.com/Alfaturachman/IBM-Applied-Data-Science-Capstone/blob/main/spacex_dash_app.py</a:t>
             </a:r>
           </a:p>
         </p:txBody>
       </p:sp>
       <p:pic>
         <p:nvPicPr>
-          <p:cNvPr id="8" name="Picture 7" descr="dash_sites.png"/>
+          <p:cNvPr id="9" name="Picture 8" descr="dash_sites.png"/>
           <p:cNvPicPr>
             <a:picLocks noChangeAspect="1"/>
           </p:cNvPicPr>
@@ -5508,7 +5809,7 @@
         </p:blipFill>
         <p:spPr>
           <a:xfrm>
-            <a:off x="6949440" y="1280160"/>
+            <a:off x="6949440" y="1188720"/>
             <a:ext cx="4754880" cy="2349470"/>
           </a:xfrm>
           <a:prstGeom prst="rect">
@@ -5655,27 +5956,63 @@
               </a:defRPr>
             </a:pPr>
             <a:r>
-              <a:t>Predictive Analysis (Classification) Results</a:t>
+              <a:t>Machine Learning Classification Results: Multi-Algorithm Performance Comparison</a:t>
             </a:r>
           </a:p>
           <a:p>
             <a:pPr>
               <a:defRPr sz="1100">
                 <a:solidFill>
-                  <a:srgbClr val="E2E8F0"/>
+                  <a:srgbClr val="D4AF37"/>
                 </a:solidFill>
                 <a:latin typeface="Arial"/>
               </a:defRPr>
             </a:pPr>
             <a:r>
-              <a:t>Model Evaluation Metrics, Confusion Matrix Breakdown, and Optimal Model Selection</a:t>
-            </a:r>
-          </a:p>
-        </p:txBody>
-      </p:sp>
-      <p:sp>
-        <p:nvSpPr>
-          <p:cNvPr id="5" name="Rectangle 4"/>
+              <a:t>Cross-Validation and Unseen Test Set Evaluation Across 4 Algorithms</a:t>
+            </a:r>
+          </a:p>
+        </p:txBody>
+      </p:sp>
+      <p:sp>
+        <p:nvSpPr>
+          <p:cNvPr id="5" name="TextBox 4"/>
+          <p:cNvSpPr txBox="1"/>
+          <p:nvPr/>
+        </p:nvSpPr>
+        <p:spPr>
+          <a:xfrm>
+            <a:off x="8412480" y="137160"/>
+            <a:ext cx="3291840" cy="548640"/>
+          </a:xfrm>
+          <a:prstGeom prst="rect">
+            <a:avLst/>
+          </a:prstGeom>
+          <a:noFill/>
+        </p:spPr>
+        <p:txBody>
+          <a:bodyPr wrap="none">
+            <a:spAutoFit/>
+          </a:bodyPr>
+          <a:lstStyle/>
+          <a:p>
+            <a:pPr>
+              <a:defRPr sz="1100" b="1">
+                <a:solidFill>
+                  <a:srgbClr val="FFFFFF"/>
+                </a:solidFill>
+                <a:latin typeface="Arial"/>
+              </a:defRPr>
+            </a:pPr>
+            <a:r>
+              <a:t>IBM Applied Data Science Capstone</a:t>
+            </a:r>
+          </a:p>
+        </p:txBody>
+      </p:sp>
+      <p:sp>
+        <p:nvSpPr>
+          <p:cNvPr id="6" name="Rectangle 5"/>
           <p:cNvSpPr/>
           <p:nvPr/>
         </p:nvSpPr>
@@ -5720,13 +6057,13 @@
       </p:sp>
       <p:sp>
         <p:nvSpPr>
-          <p:cNvPr id="6" name="TextBox 5"/>
+          <p:cNvPr id="7" name="TextBox 6"/>
           <p:cNvSpPr txBox="1"/>
           <p:nvPr/>
         </p:nvSpPr>
         <p:spPr>
           <a:xfrm>
-            <a:off x="457200" y="6473952"/>
+            <a:off x="457200" y="6492240"/>
             <a:ext cx="11277295" cy="320040"/>
           </a:xfrm>
           <a:prstGeom prst="rect">
@@ -5741,7 +6078,7 @@
           <a:lstStyle/>
           <a:p>
             <a:pPr>
-              <a:defRPr sz="1000">
+              <a:defRPr sz="950">
                 <a:solidFill>
                   <a:srgbClr val="64748B"/>
                 </a:solidFill>
@@ -5749,21 +6086,21 @@
               </a:defRPr>
             </a:pPr>
             <a:r>
-              <a:t>IBM Applied Data Science Capstone | Learner: alfaturachman | GitHub: https://github.com/alfaturachman/IBM-Applied-Data-Science-Capstone</a:t>
-            </a:r>
-          </a:p>
-        </p:txBody>
-      </p:sp>
-      <p:sp>
-        <p:nvSpPr>
-          <p:cNvPr id="7" name="TextBox 6"/>
+              <a:t>SpaceX Falcon 9 Landing Prediction | Executive Portfolio Report | Learner: alfaturachman</a:t>
+            </a:r>
+          </a:p>
+        </p:txBody>
+      </p:sp>
+      <p:sp>
+        <p:nvSpPr>
+          <p:cNvPr id="8" name="TextBox 7"/>
           <p:cNvSpPr txBox="1"/>
           <p:nvPr/>
         </p:nvSpPr>
         <p:spPr>
           <a:xfrm>
-            <a:off x="548640" y="1051560"/>
-            <a:ext cx="6217920" cy="5212080"/>
+            <a:off x="548640" y="1005840"/>
+            <a:ext cx="6217920" cy="5303520"/>
           </a:xfrm>
           <a:prstGeom prst="rect">
             <a:avLst/>
@@ -5775,14 +6112,13 @@
             <a:spAutoFit/>
           </a:bodyPr>
           <a:lstStyle/>
-          <a:p/>
           <a:p>
             <a:pPr>
               <a:spcBef>
-                <a:spcPts val="600"/>
+                <a:spcPts val="0"/>
               </a:spcBef>
               <a:spcAft>
-                <a:spcPts val="200"/>
+                <a:spcPts val="100"/>
               </a:spcAft>
             </a:pPr>
             <a:r>
@@ -5791,7 +6127,7 @@
                   <a:srgbClr val="1B365D"/>
                 </a:solidFill>
               </a:rPr>
-              <a:t>Model Accuracy Evaluation</a:t>
+              <a:t>10-Fold CV Validation Scores</a:t>
             </a:r>
           </a:p>
           <a:p>
@@ -5801,21 +6137,21 @@
               </a:spcAft>
             </a:pPr>
             <a:r>
-              <a:rPr sz="1050">
+              <a:rPr sz="1000">
                 <a:solidFill>
                   <a:srgbClr val="1E293B"/>
                 </a:solidFill>
               </a:rPr>
-              <a:t>All four tuned models achieved an identical test accuracy of 83.33% on the 18 unseen test samples (15 correct predictions out of 18).</a:t>
+              <a:t>Decision Tree achieved the highest CV score (87.22%), followed by SVM (84.82%), KNN (84.82%), and Logistic Regression (84.64%).</a:t>
             </a:r>
           </a:p>
           <a:p>
             <a:pPr>
               <a:spcBef>
-                <a:spcPts val="600"/>
+                <a:spcPts val="400"/>
               </a:spcBef>
               <a:spcAft>
-                <a:spcPts val="200"/>
+                <a:spcPts val="100"/>
               </a:spcAft>
             </a:pPr>
             <a:r>
@@ -5824,7 +6160,7 @@
                   <a:srgbClr val="1B365D"/>
                 </a:solidFill>
               </a:rPr>
-              <a:t>Optimal Hyperparameters</a:t>
+              <a:t>Generalization Test Accuracy</a:t>
             </a:r>
           </a:p>
           <a:p>
@@ -5834,21 +6170,21 @@
               </a:spcAft>
             </a:pPr>
             <a:r>
-              <a:rPr sz="1050">
+              <a:rPr sz="1000">
                 <a:solidFill>
                   <a:srgbClr val="1E293B"/>
                 </a:solidFill>
               </a:rPr>
-              <a:t>Logistic Regression: C=0.01, penalty='l2'. SVM: kernel='sigmoid', C=1.0, gamma=0.0316. Decision Tree: criterion='entropy', max_depth=8. KNN: n_neighbors=5, p=1.</a:t>
+              <a:t>All 4 models achieved identical 83.33% test accuracy on the unseen 18-sample evaluation dataset (15 correct predictions out of 18).</a:t>
             </a:r>
           </a:p>
           <a:p>
             <a:pPr>
               <a:spcBef>
-                <a:spcPts val="600"/>
+                <a:spcPts val="400"/>
               </a:spcBef>
               <a:spcAft>
-                <a:spcPts val="200"/>
+                <a:spcPts val="100"/>
               </a:spcAft>
             </a:pPr>
             <a:r>
@@ -5857,7 +6193,7 @@
                   <a:srgbClr val="1B365D"/>
                 </a:solidFill>
               </a:rPr>
-              <a:t>Confusion Matrix Breakdown (N = 18)</a:t>
+              <a:t>Optimal Hyperparameters (GridSearchCV)</a:t>
             </a:r>
           </a:p>
           <a:p>
@@ -5867,22 +6203,21 @@
               </a:spcAft>
             </a:pPr>
             <a:r>
-              <a:rPr sz="1050">
+              <a:rPr sz="1000">
                 <a:solidFill>
                   <a:srgbClr val="1E293B"/>
                 </a:solidFill>
               </a:rPr>
-              <a:t>True Positives (TP): 12 | True Negatives (TN): 3
-False Positives (FP): 3 | False Negatives (FN): 0</a:t>
+              <a:t>Logistic Regression: C=0.01, penalty='l2', solver='lbfgs'. SVM: kernel='sigmoid', C=1.0, gamma='scale'. Decision Tree: criterion='gini', splitter='random'. KNN: n_neighbors=10, p=1, algorithm='auto'.</a:t>
             </a:r>
           </a:p>
           <a:p>
             <a:pPr>
               <a:spcBef>
-                <a:spcPts val="600"/>
+                <a:spcPts val="400"/>
               </a:spcBef>
               <a:spcAft>
-                <a:spcPts val="200"/>
+                <a:spcPts val="100"/>
               </a:spcAft>
             </a:pPr>
             <a:r>
@@ -5891,7 +6226,7 @@
                   <a:srgbClr val="1B365D"/>
                 </a:solidFill>
               </a:rPr>
-              <a:t>Model Recommendation</a:t>
+              <a:t>Production Model Recommendation</a:t>
             </a:r>
           </a:p>
           <a:p>
@@ -5901,19 +6236,52 @@
               </a:spcAft>
             </a:pPr>
             <a:r>
-              <a:rPr sz="1050">
+              <a:rPr sz="1000">
                 <a:solidFill>
                   <a:srgbClr val="1E293B"/>
                 </a:solidFill>
               </a:rPr>
-              <a:t>Logistic Regression is recommended for production deployment due to high computational efficiency, interpretability, and smooth probability calibration.</a:t>
+              <a:t>Logistic Regression is recommended for production deployment due to high computational efficiency, interpretability, and robust probability calibration.</a:t>
+            </a:r>
+          </a:p>
+          <a:p>
+            <a:pPr>
+              <a:spcBef>
+                <a:spcPts val="400"/>
+              </a:spcBef>
+              <a:spcAft>
+                <a:spcPts val="100"/>
+              </a:spcAft>
+            </a:pPr>
+            <a:r>
+              <a:rPr b="1" sz="1200">
+                <a:solidFill>
+                  <a:srgbClr val="1B365D"/>
+                </a:solidFill>
+              </a:rPr>
+              <a:t>Lab Code URL</a:t>
+            </a:r>
+          </a:p>
+          <a:p>
+            <a:pPr lvl="1">
+              <a:spcAft>
+                <a:spcPts val="400"/>
+              </a:spcAft>
+            </a:pPr>
+            <a:r>
+              <a:rPr sz="1000">
+                <a:solidFill>
+                  <a:srgbClr val="1E293B"/>
+                </a:solidFill>
+              </a:rPr>
+              <a:t>Machine Learning Prediction Notebook: https://github.com/Alfaturachman/IBM-Applied-Data-Science-Capstone/blob/main/SpaceX-Machine-Learning-Prediction-Part-5-v1.ipynb</a:t>
             </a:r>
           </a:p>
         </p:txBody>
       </p:sp>
       <p:pic>
         <p:nvPicPr>
-          <p:cNvPr id="8" name="Picture 7" descr="confusion_matrix.png"/>
+          <p:cNvPr id="9" name="Picture 8" descr="ml_models.png"/>
           <p:cNvPicPr>
             <a:picLocks noChangeAspect="1"/>
           </p:cNvPicPr>
@@ -5927,8 +6295,8 @@
         </p:blipFill>
         <p:spPr>
           <a:xfrm>
-            <a:off x="6949440" y="1280160"/>
-            <a:ext cx="4754880" cy="3566160"/>
+            <a:off x="6949440" y="1188720"/>
+            <a:ext cx="4754880" cy="2349470"/>
           </a:xfrm>
           <a:prstGeom prst="rect">
             <a:avLst/>
@@ -6074,27 +6442,63 @@
               </a:defRPr>
             </a:pPr>
             <a:r>
-              <a:t>Conclusion &amp; Strategic Business Recommendations</a:t>
+              <a:t>Classification Evaluation &amp; Confusion Matrix Diagnostics</a:t>
             </a:r>
           </a:p>
           <a:p>
             <a:pPr>
               <a:defRPr sz="1100">
                 <a:solidFill>
-                  <a:srgbClr val="E2E8F0"/>
+                  <a:srgbClr val="D4AF37"/>
                 </a:solidFill>
                 <a:latin typeface="Arial"/>
               </a:defRPr>
             </a:pPr>
             <a:r>
-              <a:t>Actionable Takeaways for Aerospace Competitors Bidding Against SpaceX</a:t>
-            </a:r>
-          </a:p>
-        </p:txBody>
-      </p:sp>
-      <p:sp>
-        <p:nvSpPr>
-          <p:cNvPr id="5" name="Rectangle 4"/>
+              <a:t>Detailed Error Breakdown, Metric Evaluation, and Identical Performance Analysis</a:t>
+            </a:r>
+          </a:p>
+        </p:txBody>
+      </p:sp>
+      <p:sp>
+        <p:nvSpPr>
+          <p:cNvPr id="5" name="TextBox 4"/>
+          <p:cNvSpPr txBox="1"/>
+          <p:nvPr/>
+        </p:nvSpPr>
+        <p:spPr>
+          <a:xfrm>
+            <a:off x="8412480" y="137160"/>
+            <a:ext cx="3291840" cy="548640"/>
+          </a:xfrm>
+          <a:prstGeom prst="rect">
+            <a:avLst/>
+          </a:prstGeom>
+          <a:noFill/>
+        </p:spPr>
+        <p:txBody>
+          <a:bodyPr wrap="none">
+            <a:spAutoFit/>
+          </a:bodyPr>
+          <a:lstStyle/>
+          <a:p>
+            <a:pPr>
+              <a:defRPr sz="1100" b="1">
+                <a:solidFill>
+                  <a:srgbClr val="FFFFFF"/>
+                </a:solidFill>
+                <a:latin typeface="Arial"/>
+              </a:defRPr>
+            </a:pPr>
+            <a:r>
+              <a:t>IBM Applied Data Science Capstone</a:t>
+            </a:r>
+          </a:p>
+        </p:txBody>
+      </p:sp>
+      <p:sp>
+        <p:nvSpPr>
+          <p:cNvPr id="6" name="Rectangle 5"/>
           <p:cNvSpPr/>
           <p:nvPr/>
         </p:nvSpPr>
@@ -6139,13 +6543,13 @@
       </p:sp>
       <p:sp>
         <p:nvSpPr>
-          <p:cNvPr id="6" name="TextBox 5"/>
+          <p:cNvPr id="7" name="TextBox 6"/>
           <p:cNvSpPr txBox="1"/>
           <p:nvPr/>
         </p:nvSpPr>
         <p:spPr>
           <a:xfrm>
-            <a:off x="457200" y="6473952"/>
+            <a:off x="457200" y="6492240"/>
             <a:ext cx="11277295" cy="320040"/>
           </a:xfrm>
           <a:prstGeom prst="rect">
@@ -6160,7 +6564,7 @@
           <a:lstStyle/>
           <a:p>
             <a:pPr>
-              <a:defRPr sz="1000">
+              <a:defRPr sz="950">
                 <a:solidFill>
                   <a:srgbClr val="64748B"/>
                 </a:solidFill>
@@ -6168,21 +6572,21 @@
               </a:defRPr>
             </a:pPr>
             <a:r>
-              <a:t>IBM Applied Data Science Capstone | Learner: alfaturachman | GitHub: https://github.com/alfaturachman/IBM-Applied-Data-Science-Capstone</a:t>
-            </a:r>
-          </a:p>
-        </p:txBody>
-      </p:sp>
-      <p:sp>
-        <p:nvSpPr>
-          <p:cNvPr id="7" name="TextBox 6"/>
+              <a:t>SpaceX Falcon 9 Landing Prediction | Executive Portfolio Report | Learner: alfaturachman</a:t>
+            </a:r>
+          </a:p>
+        </p:txBody>
+      </p:sp>
+      <p:sp>
+        <p:nvSpPr>
+          <p:cNvPr id="8" name="TextBox 7"/>
           <p:cNvSpPr txBox="1"/>
           <p:nvPr/>
         </p:nvSpPr>
         <p:spPr>
           <a:xfrm>
-            <a:off x="548640" y="1051560"/>
-            <a:ext cx="11094415" cy="5212080"/>
+            <a:off x="548640" y="1005840"/>
+            <a:ext cx="6217920" cy="5303520"/>
           </a:xfrm>
           <a:prstGeom prst="rect">
             <a:avLst/>
@@ -6194,141 +6598,164 @@
             <a:spAutoFit/>
           </a:bodyPr>
           <a:lstStyle/>
-          <a:p/>
           <a:p>
             <a:pPr>
               <a:spcBef>
-                <a:spcPts val="800"/>
+                <a:spcPts val="0"/>
               </a:spcBef>
               <a:spcAft>
-                <a:spcPts val="200"/>
-              </a:spcAft>
-            </a:pPr>
-            <a:r>
-              <a:rPr b="1" sz="1300">
+                <a:spcPts val="100"/>
+              </a:spcAft>
+            </a:pPr>
+            <a:r>
+              <a:rPr b="1" sz="1200">
                 <a:solidFill>
                   <a:srgbClr val="1B365D"/>
                 </a:solidFill>
               </a:rPr>
-              <a:t>Predictive Feasibility</a:t>
+              <a:t>Confusion Matrix Values (18 Test Samples)</a:t>
             </a:r>
           </a:p>
           <a:p>
             <a:pPr lvl="1">
               <a:spcAft>
-                <a:spcPts val="600"/>
-              </a:spcAft>
-            </a:pPr>
-            <a:r>
-              <a:rPr sz="1100">
+                <a:spcPts val="400"/>
+              </a:spcAft>
+            </a:pPr>
+            <a:r>
+              <a:rPr sz="1000">
                 <a:solidFill>
                   <a:srgbClr val="1E293B"/>
                 </a:solidFill>
               </a:rPr>
-              <a:t>Machine learning classification reliably predicts Falcon 9 booster recovery with 83.33% accuracy, allowing aerospace competitors to forecast SpaceX's marginal launch costs.</a:t>
+              <a:t>True Positives (TP) = 12, True Negatives (TN) = 3, False Positives (FP) = 3, False Negatives (FN) = 0.</a:t>
             </a:r>
           </a:p>
           <a:p>
             <a:pPr>
               <a:spcBef>
-                <a:spcPts val="800"/>
+                <a:spcPts val="400"/>
               </a:spcBef>
               <a:spcAft>
-                <a:spcPts val="200"/>
-              </a:spcAft>
-            </a:pPr>
-            <a:r>
-              <a:rPr b="1" sz="1300">
+                <a:spcPts val="100"/>
+              </a:spcAft>
+            </a:pPr>
+            <a:r>
+              <a:rPr b="1" sz="1200">
                 <a:solidFill>
                   <a:srgbClr val="1B365D"/>
                 </a:solidFill>
               </a:rPr>
-              <a:t>Operational Risk Profile</a:t>
+              <a:t>Diagnostic Performance Metrics</a:t>
             </a:r>
           </a:p>
           <a:p>
             <a:pPr lvl="1">
               <a:spcAft>
-                <a:spcPts val="600"/>
-              </a:spcAft>
-            </a:pPr>
-            <a:r>
-              <a:rPr sz="1100">
+                <a:spcPts val="400"/>
+              </a:spcAft>
+            </a:pPr>
+            <a:r>
+              <a:rPr sz="1000">
                 <a:solidFill>
                   <a:srgbClr val="1E293B"/>
                 </a:solidFill>
               </a:rPr>
-              <a:t>Heavy payloads (&gt;6,000 kg) to GTO orbits represent high-risk missions where booster re-entry thermal loads prevent recovery. Competitors can bid aggressively on these missions because SpaceX will likely expend hardware.</a:t>
+              <a:t>Overall Accuracy = 83.33% (15/18); Precision = 80.00% (12/15); Recall (Sensitivity) = 100.00% (12/12); Specificity = 50.00% (3/6); F1-Score = 88.89%.</a:t>
             </a:r>
           </a:p>
           <a:p>
             <a:pPr>
               <a:spcBef>
-                <a:spcPts val="800"/>
+                <a:spcPts val="400"/>
               </a:spcBef>
               <a:spcAft>
-                <a:spcPts val="200"/>
-              </a:spcAft>
-            </a:pPr>
-            <a:r>
-              <a:rPr b="1" sz="1300">
+                <a:spcPts val="100"/>
+              </a:spcAft>
+            </a:pPr>
+            <a:r>
+              <a:rPr b="1" sz="1200">
                 <a:solidFill>
                   <a:srgbClr val="1B365D"/>
                 </a:solidFill>
               </a:rPr>
-              <a:t>Launch Site Selection</a:t>
+              <a:t>Why Did All 4 Models Yield Identical Test Accuracy?</a:t>
             </a:r>
           </a:p>
           <a:p>
             <a:pPr lvl="1">
               <a:spcAft>
-                <a:spcPts val="600"/>
-              </a:spcAft>
-            </a:pPr>
-            <a:r>
-              <a:rPr sz="1100">
+                <a:spcPts val="400"/>
+              </a:spcAft>
+            </a:pPr>
+            <a:r>
+              <a:rPr sz="1000">
                 <a:solidFill>
                   <a:srgbClr val="1E293B"/>
                 </a:solidFill>
               </a:rPr>
-              <a:t>KSC LC-39A demonstrates superior operational maturity (76.92% success), while CCAFS SLC-40 exhibits higher landing volatility (42.86%).</a:t>
+              <a:t>1. Small Test Sample Size (18 instances): Each single sample represents 5.56% (1/18) of the total accuracy score. 2. Shared Decision Boundary: The 3 misclassified samples represent high-mass edge cases where linear and tree splits agree. 3. Zero False Negatives: All models successfully captured 100% of true landings.</a:t>
             </a:r>
           </a:p>
           <a:p>
             <a:pPr>
               <a:spcBef>
-                <a:spcPts val="800"/>
+                <a:spcPts val="400"/>
               </a:spcBef>
               <a:spcAft>
-                <a:spcPts val="200"/>
-              </a:spcAft>
-            </a:pPr>
-            <a:r>
-              <a:rPr b="1" sz="1300">
+                <a:spcPts val="100"/>
+              </a:spcAft>
+            </a:pPr>
+            <a:r>
+              <a:rPr b="1" sz="1200">
                 <a:solidFill>
                   <a:srgbClr val="1B365D"/>
                 </a:solidFill>
               </a:rPr>
-              <a:t>Competitive Bidding Guidance</a:t>
+              <a:t>Lab Code URL</a:t>
             </a:r>
           </a:p>
           <a:p>
             <a:pPr lvl="1">
               <a:spcAft>
-                <a:spcPts val="600"/>
-              </a:spcAft>
-            </a:pPr>
-            <a:r>
-              <a:rPr sz="1100">
+                <a:spcPts val="400"/>
+              </a:spcAft>
+            </a:pPr>
+            <a:r>
+              <a:rPr sz="1000">
                 <a:solidFill>
                   <a:srgbClr val="1E293B"/>
                 </a:solidFill>
               </a:rPr>
-              <a:t>When competing for LEO / smallsat constellations (2,000 - 4,000 kg), expect SpaceX to bid at $62M due to a &gt;72% landing probability. For heavy GTO flights, price bids assuming SpaceX incurs expendable booster costs ($100M+).</a:t>
-            </a:r>
-          </a:p>
-        </p:txBody>
-      </p:sp>
+              <a:t>Dedicated ML Notebook: https://github.com/Alfaturachman/IBM-Applied-Data-Science-Capstone/blob/main/SpaceX-Machine-Learning-Prediction-Part-5-v1.ipynb</a:t>
+            </a:r>
+          </a:p>
+        </p:txBody>
+      </p:sp>
+      <p:pic>
+        <p:nvPicPr>
+          <p:cNvPr id="9" name="Picture 8" descr="confusion_matrix.png"/>
+          <p:cNvPicPr>
+            <a:picLocks noChangeAspect="1"/>
+          </p:cNvPicPr>
+          <p:nvPr/>
+        </p:nvPicPr>
+        <p:blipFill>
+          <a:blip r:embed="rId2"/>
+          <a:stretch>
+            <a:fillRect/>
+          </a:stretch>
+        </p:blipFill>
+        <p:spPr>
+          <a:xfrm>
+            <a:off x="6949440" y="1188720"/>
+            <a:ext cx="4754880" cy="3566160"/>
+          </a:xfrm>
+          <a:prstGeom prst="rect">
+            <a:avLst/>
+          </a:prstGeom>
+        </p:spPr>
+      </p:pic>
     </p:spTree>
   </p:cSld>
   <p:clrMapOvr>
@@ -6468,27 +6895,63 @@
               </a:defRPr>
             </a:pPr>
             <a:r>
-              <a:t>Innovative Insights &amp; Future Technical Roadmap</a:t>
+              <a:t>Conclusion &amp; Strategic Business Recommendations</a:t>
             </a:r>
           </a:p>
           <a:p>
             <a:pPr>
               <a:defRPr sz="1100">
                 <a:solidFill>
-                  <a:srgbClr val="E2E8F0"/>
+                  <a:srgbClr val="D4AF37"/>
                 </a:solidFill>
                 <a:latin typeface="Arial"/>
               </a:defRPr>
             </a:pPr>
             <a:r>
-              <a:t>Financial Impact of Misclassifications, Class Rebalancing, and Enterprise Scalability</a:t>
-            </a:r>
-          </a:p>
-        </p:txBody>
-      </p:sp>
-      <p:sp>
-        <p:nvSpPr>
-          <p:cNvPr id="5" name="Rectangle 4"/>
+              <a:t>Synthesis of Empirical Findings, Cost Implications, and Aerospace Bidding Strategy</a:t>
+            </a:r>
+          </a:p>
+        </p:txBody>
+      </p:sp>
+      <p:sp>
+        <p:nvSpPr>
+          <p:cNvPr id="5" name="TextBox 4"/>
+          <p:cNvSpPr txBox="1"/>
+          <p:nvPr/>
+        </p:nvSpPr>
+        <p:spPr>
+          <a:xfrm>
+            <a:off x="8412480" y="137160"/>
+            <a:ext cx="3291840" cy="548640"/>
+          </a:xfrm>
+          <a:prstGeom prst="rect">
+            <a:avLst/>
+          </a:prstGeom>
+          <a:noFill/>
+        </p:spPr>
+        <p:txBody>
+          <a:bodyPr wrap="none">
+            <a:spAutoFit/>
+          </a:bodyPr>
+          <a:lstStyle/>
+          <a:p>
+            <a:pPr>
+              <a:defRPr sz="1100" b="1">
+                <a:solidFill>
+                  <a:srgbClr val="FFFFFF"/>
+                </a:solidFill>
+                <a:latin typeface="Arial"/>
+              </a:defRPr>
+            </a:pPr>
+            <a:r>
+              <a:t>IBM Applied Data Science Capstone</a:t>
+            </a:r>
+          </a:p>
+        </p:txBody>
+      </p:sp>
+      <p:sp>
+        <p:nvSpPr>
+          <p:cNvPr id="6" name="Rectangle 5"/>
           <p:cNvSpPr/>
           <p:nvPr/>
         </p:nvSpPr>
@@ -6533,13 +6996,13 @@
       </p:sp>
       <p:sp>
         <p:nvSpPr>
-          <p:cNvPr id="6" name="TextBox 5"/>
+          <p:cNvPr id="7" name="TextBox 6"/>
           <p:cNvSpPr txBox="1"/>
           <p:nvPr/>
         </p:nvSpPr>
         <p:spPr>
           <a:xfrm>
-            <a:off x="457200" y="6473952"/>
+            <a:off x="457200" y="6492240"/>
             <a:ext cx="11277295" cy="320040"/>
           </a:xfrm>
           <a:prstGeom prst="rect">
@@ -6554,7 +7017,7 @@
           <a:lstStyle/>
           <a:p>
             <a:pPr>
-              <a:defRPr sz="1000">
+              <a:defRPr sz="950">
                 <a:solidFill>
                   <a:srgbClr val="64748B"/>
                 </a:solidFill>
@@ -6562,21 +7025,21 @@
               </a:defRPr>
             </a:pPr>
             <a:r>
-              <a:t>IBM Applied Data Science Capstone | Learner: alfaturachman | GitHub: https://github.com/alfaturachman/IBM-Applied-Data-Science-Capstone</a:t>
-            </a:r>
-          </a:p>
-        </p:txBody>
-      </p:sp>
-      <p:sp>
-        <p:nvSpPr>
-          <p:cNvPr id="7" name="TextBox 6"/>
+              <a:t>SpaceX Falcon 9 Landing Prediction | Executive Portfolio Report | Learner: alfaturachman</a:t>
+            </a:r>
+          </a:p>
+        </p:txBody>
+      </p:sp>
+      <p:sp>
+        <p:nvSpPr>
+          <p:cNvPr id="8" name="TextBox 7"/>
           <p:cNvSpPr txBox="1"/>
           <p:nvPr/>
         </p:nvSpPr>
         <p:spPr>
           <a:xfrm>
-            <a:off x="548640" y="1051560"/>
-            <a:ext cx="11094415" cy="5212080"/>
+            <a:off x="548640" y="1005840"/>
+            <a:ext cx="11094415" cy="5303520"/>
           </a:xfrm>
           <a:prstGeom prst="rect">
             <a:avLst/>
@@ -6588,137 +7051,598 @@
             <a:spAutoFit/>
           </a:bodyPr>
           <a:lstStyle/>
-          <a:p/>
           <a:p>
             <a:pPr>
               <a:spcBef>
-                <a:spcPts val="800"/>
+                <a:spcPts val="0"/>
               </a:spcBef>
               <a:spcAft>
-                <a:spcPts val="200"/>
-              </a:spcAft>
-            </a:pPr>
-            <a:r>
-              <a:rPr b="1" sz="1300">
+                <a:spcPts val="100"/>
+              </a:spcAft>
+            </a:pPr>
+            <a:r>
+              <a:rPr b="1" sz="1200">
                 <a:solidFill>
                   <a:srgbClr val="1B365D"/>
                 </a:solidFill>
               </a:rPr>
-              <a:t>Asymmetric Financial Impact of Errors</a:t>
+              <a:t>Commercial Feasibility of Machine Learning</a:t>
             </a:r>
           </a:p>
           <a:p>
             <a:pPr lvl="1">
               <a:spcAft>
-                <a:spcPts val="600"/>
-              </a:spcAft>
-            </a:pPr>
-            <a:r>
-              <a:rPr sz="1100">
+                <a:spcPts val="400"/>
+              </a:spcAft>
+            </a:pPr>
+            <a:r>
+              <a:rPr sz="1050">
                 <a:solidFill>
                   <a:srgbClr val="1E293B"/>
                 </a:solidFill>
               </a:rPr>
-              <a:t>Zero False Negatives (FN = 0) ensures sea recovery assets (drone ships, tugboats) are never omitted when a booster lands. However, 3 False Positives (FP = 3) incur ~$200K-$500K in unnecessary sea deployment expenses for unrecovered hardware.</a:t>
+              <a:t>First-stage landing outcome can be predicted with 83.33% accuracy, allowing competitors to forecast SpaceX's marginal costs and bid competitively on satellite launch contracts.</a:t>
             </a:r>
           </a:p>
           <a:p>
             <a:pPr>
               <a:spcBef>
-                <a:spcPts val="800"/>
+                <a:spcPts val="400"/>
               </a:spcBef>
               <a:spcAft>
-                <a:spcPts val="200"/>
-              </a:spcAft>
-            </a:pPr>
-            <a:r>
-              <a:rPr b="1" sz="1300">
+                <a:spcPts val="100"/>
+              </a:spcAft>
+            </a:pPr>
+            <a:r>
+              <a:rPr b="1" sz="1200">
                 <a:solidFill>
                   <a:srgbClr val="1B365D"/>
                 </a:solidFill>
               </a:rPr>
-              <a:t>Class Imbalance Remediation</a:t>
+              <a:t>Payload &amp; Orbit Strategic Guidelines</a:t>
             </a:r>
           </a:p>
           <a:p>
             <a:pPr lvl="1">
               <a:spcAft>
-                <a:spcPts val="600"/>
-              </a:spcAft>
-            </a:pPr>
-            <a:r>
-              <a:rPr sz="1100">
+                <a:spcPts val="400"/>
+              </a:spcAft>
+            </a:pPr>
+            <a:r>
+              <a:rPr sz="1050">
                 <a:solidFill>
                   <a:srgbClr val="1E293B"/>
                 </a:solidFill>
               </a:rPr>
-              <a:t>Because successful landings constitute 66.7% of historical data, models naturally bias toward predicting success. Applying SMOTE (Synthetic Minority Over-sampling Technique) or cost-sensitive class weighting will penalize False Positives and improve sensitivity to high-risk flight parameters.</a:t>
+              <a:t>Mid-mass payloads (2,000 - 4,000 kg) and LEO/SSO orbits have very high landing probabilities (&gt;72%), allowing SpaceX to bid at $62M. Heavy GTO payloads (&gt;6,000 kg) carry high landing failure risks, forcing higher expendable pricing.</a:t>
             </a:r>
           </a:p>
           <a:p>
             <a:pPr>
               <a:spcBef>
-                <a:spcPts val="800"/>
+                <a:spcPts val="400"/>
               </a:spcBef>
               <a:spcAft>
-                <a:spcPts val="200"/>
-              </a:spcAft>
-            </a:pPr>
-            <a:r>
-              <a:rPr b="1" sz="1300">
+                <a:spcPts val="100"/>
+              </a:spcAft>
+            </a:pPr>
+            <a:r>
+              <a:rPr b="1" sz="1200">
                 <a:solidFill>
                   <a:srgbClr val="1B365D"/>
                 </a:solidFill>
               </a:rPr>
-              <a:t>Creative Presentation Architecture</a:t>
+              <a:t>Launch Site Operational Recommendation</a:t>
             </a:r>
           </a:p>
           <a:p>
             <a:pPr lvl="1">
               <a:spcAft>
-                <a:spcPts val="600"/>
-              </a:spcAft>
-            </a:pPr>
-            <a:r>
-              <a:rPr sz="1100">
+                <a:spcPts val="400"/>
+              </a:spcAft>
+            </a:pPr>
+            <a:r>
+              <a:rPr sz="1050">
                 <a:solidFill>
                   <a:srgbClr val="1E293B"/>
                 </a:solidFill>
               </a:rPr>
-              <a:t>Constructed a unified design system with high-contrast data visualizations, geodetic proximity metrics, and full open-source reproducibility.</a:t>
+              <a:t>Contractors requiring guaranteed re-flight booster turnaround should prioritize KSC LC-39A (76.92% success rate) over Cape Canaveral SLC-40 (42.86%).</a:t>
             </a:r>
           </a:p>
           <a:p>
             <a:pPr>
               <a:spcBef>
-                <a:spcPts val="800"/>
+                <a:spcPts val="400"/>
               </a:spcBef>
               <a:spcAft>
-                <a:spcPts val="200"/>
-              </a:spcAft>
-            </a:pPr>
-            <a:r>
-              <a:rPr b="1" sz="1300">
+                <a:spcPts val="100"/>
+              </a:spcAft>
+            </a:pPr>
+            <a:r>
+              <a:rPr b="1" sz="1200">
                 <a:solidFill>
                   <a:srgbClr val="1B365D"/>
                 </a:solidFill>
               </a:rPr>
-              <a:t>Project Code Repository</a:t>
+              <a:t>Industrial Block 5 Maturation</a:t>
             </a:r>
           </a:p>
           <a:p>
             <a:pPr lvl="1">
               <a:spcAft>
-                <a:spcPts val="600"/>
-              </a:spcAft>
-            </a:pPr>
-            <a:r>
-              <a:rPr sz="1100">
+                <a:spcPts val="400"/>
+              </a:spcAft>
+            </a:pPr>
+            <a:r>
+              <a:rPr sz="1050">
                 <a:solidFill>
                   <a:srgbClr val="1E293B"/>
                 </a:solidFill>
               </a:rPr>
-              <a:t>Full codebase and notebooks available at: https://github.com/alfaturachman/IBM-Applied-Data-Science-Capstone</a:t>
+              <a:t>Since the introduction of Booster Block 5, hardware reliability has reached 100%, fundamentally transforming spaceflight economics.</a:t>
+            </a:r>
+          </a:p>
+          <a:p>
+            <a:pPr>
+              <a:spcBef>
+                <a:spcPts val="400"/>
+              </a:spcBef>
+              <a:spcAft>
+                <a:spcPts val="100"/>
+              </a:spcAft>
+            </a:pPr>
+            <a:r>
+              <a:rPr b="1" sz="1200">
+                <a:solidFill>
+                  <a:srgbClr val="1B365D"/>
+                </a:solidFill>
+              </a:rPr>
+              <a:t>Complete Project Repository</a:t>
+            </a:r>
+          </a:p>
+          <a:p>
+            <a:pPr lvl="1">
+              <a:spcAft>
+                <a:spcPts val="400"/>
+              </a:spcAft>
+            </a:pPr>
+            <a:r>
+              <a:rPr sz="1050">
+                <a:solidFill>
+                  <a:srgbClr val="1E293B"/>
+                </a:solidFill>
+              </a:rPr>
+              <a:t>Full open-source codebase &amp; deliverables: https://github.com/Alfaturachman/IBM-Applied-Data-Science-Capstone/blob/main/</a:t>
+            </a:r>
+          </a:p>
+        </p:txBody>
+      </p:sp>
+    </p:spTree>
+  </p:cSld>
+  <p:clrMapOvr>
+    <a:masterClrMapping/>
+  </p:clrMapOvr>
+</p:sld>
+</file>
+
+<file path=ppt/slides/slide18.xml><?xml version="1.0" encoding="utf-8"?>
+<p:sld xmlns:a="http://schemas.openxmlformats.org/drawingml/2006/main" xmlns:p="http://schemas.openxmlformats.org/presentationml/2006/main" xmlns:r="http://schemas.openxmlformats.org/officeDocument/2006/relationships">
+  <p:cSld>
+    <p:spTree>
+      <p:nvGrpSpPr>
+        <p:cNvPr id="1" name=""/>
+        <p:cNvGrpSpPr/>
+        <p:nvPr/>
+      </p:nvGrpSpPr>
+      <p:grpSpPr/>
+      <p:sp>
+        <p:nvSpPr>
+          <p:cNvPr id="2" name="Rectangle 1"/>
+          <p:cNvSpPr/>
+          <p:nvPr/>
+        </p:nvSpPr>
+        <p:spPr>
+          <a:xfrm>
+            <a:off x="0" y="0"/>
+            <a:ext cx="12191695" cy="822960"/>
+          </a:xfrm>
+          <a:prstGeom prst="rect">
+            <a:avLst/>
+          </a:prstGeom>
+          <a:solidFill>
+            <a:srgbClr val="1B365D"/>
+          </a:solidFill>
+          <a:ln>
+            <a:solidFill>
+              <a:srgbClr val="1B365D"/>
+            </a:solidFill>
+          </a:ln>
+        </p:spPr>
+        <p:style>
+          <a:lnRef idx="1">
+            <a:schemeClr val="accent1"/>
+          </a:lnRef>
+          <a:fillRef idx="3">
+            <a:schemeClr val="accent1"/>
+          </a:fillRef>
+          <a:effectRef idx="2">
+            <a:schemeClr val="accent1"/>
+          </a:effectRef>
+          <a:fontRef idx="minor">
+            <a:schemeClr val="lt1"/>
+          </a:fontRef>
+        </p:style>
+        <p:txBody>
+          <a:bodyPr rtlCol="0" anchor="ctr"/>
+          <a:lstStyle/>
+          <a:p>
+            <a:pPr algn="ctr"/>
+          </a:p>
+        </p:txBody>
+      </p:sp>
+      <p:sp>
+        <p:nvSpPr>
+          <p:cNvPr id="3" name="Rectangle 2"/>
+          <p:cNvSpPr/>
+          <p:nvPr/>
+        </p:nvSpPr>
+        <p:spPr>
+          <a:xfrm>
+            <a:off x="0" y="822960"/>
+            <a:ext cx="12191695" cy="36576"/>
+          </a:xfrm>
+          <a:prstGeom prst="rect">
+            <a:avLst/>
+          </a:prstGeom>
+          <a:solidFill>
+            <a:srgbClr val="D4AF37"/>
+          </a:solidFill>
+          <a:ln>
+            <a:solidFill>
+              <a:srgbClr val="D4AF37"/>
+            </a:solidFill>
+          </a:ln>
+        </p:spPr>
+        <p:style>
+          <a:lnRef idx="1">
+            <a:schemeClr val="accent1"/>
+          </a:lnRef>
+          <a:fillRef idx="3">
+            <a:schemeClr val="accent1"/>
+          </a:fillRef>
+          <a:effectRef idx="2">
+            <a:schemeClr val="accent1"/>
+          </a:effectRef>
+          <a:fontRef idx="minor">
+            <a:schemeClr val="lt1"/>
+          </a:fontRef>
+        </p:style>
+        <p:txBody>
+          <a:bodyPr rtlCol="0" anchor="ctr"/>
+          <a:lstStyle/>
+          <a:p>
+            <a:pPr algn="ctr"/>
+          </a:p>
+        </p:txBody>
+      </p:sp>
+      <p:sp>
+        <p:nvSpPr>
+          <p:cNvPr id="4" name="TextBox 3"/>
+          <p:cNvSpPr txBox="1"/>
+          <p:nvPr/>
+        </p:nvSpPr>
+        <p:spPr>
+          <a:xfrm>
+            <a:off x="457200" y="45720"/>
+            <a:ext cx="7772400" cy="731520"/>
+          </a:xfrm>
+          <a:prstGeom prst="rect">
+            <a:avLst/>
+          </a:prstGeom>
+          <a:noFill/>
+        </p:spPr>
+        <p:txBody>
+          <a:bodyPr wrap="square">
+            <a:spAutoFit/>
+          </a:bodyPr>
+          <a:lstStyle/>
+          <a:p>
+            <a:pPr>
+              <a:defRPr sz="2000" b="1">
+                <a:solidFill>
+                  <a:srgbClr val="FFFFFF"/>
+                </a:solidFill>
+                <a:latin typeface="Arial"/>
+              </a:defRPr>
+            </a:pPr>
+            <a:r>
+              <a:t>Innovative Insights &amp; Future Technical Roadmap</a:t>
+            </a:r>
+          </a:p>
+          <a:p>
+            <a:pPr>
+              <a:defRPr sz="1100">
+                <a:solidFill>
+                  <a:srgbClr val="D4AF37"/>
+                </a:solidFill>
+                <a:latin typeface="Arial"/>
+              </a:defRPr>
+            </a:pPr>
+            <a:r>
+              <a:t>Financial Impact of Misclassifications, Cost-Sensitive Learning, and SMOTE</a:t>
+            </a:r>
+          </a:p>
+        </p:txBody>
+      </p:sp>
+      <p:sp>
+        <p:nvSpPr>
+          <p:cNvPr id="5" name="TextBox 4"/>
+          <p:cNvSpPr txBox="1"/>
+          <p:nvPr/>
+        </p:nvSpPr>
+        <p:spPr>
+          <a:xfrm>
+            <a:off x="8412480" y="137160"/>
+            <a:ext cx="3291840" cy="548640"/>
+          </a:xfrm>
+          <a:prstGeom prst="rect">
+            <a:avLst/>
+          </a:prstGeom>
+          <a:noFill/>
+        </p:spPr>
+        <p:txBody>
+          <a:bodyPr wrap="none">
+            <a:spAutoFit/>
+          </a:bodyPr>
+          <a:lstStyle/>
+          <a:p>
+            <a:pPr>
+              <a:defRPr sz="1100" b="1">
+                <a:solidFill>
+                  <a:srgbClr val="FFFFFF"/>
+                </a:solidFill>
+                <a:latin typeface="Arial"/>
+              </a:defRPr>
+            </a:pPr>
+            <a:r>
+              <a:t>IBM Applied Data Science Capstone</a:t>
+            </a:r>
+          </a:p>
+        </p:txBody>
+      </p:sp>
+      <p:sp>
+        <p:nvSpPr>
+          <p:cNvPr id="6" name="Rectangle 5"/>
+          <p:cNvSpPr/>
+          <p:nvPr/>
+        </p:nvSpPr>
+        <p:spPr>
+          <a:xfrm>
+            <a:off x="0" y="6446520"/>
+            <a:ext cx="12191695" cy="411480"/>
+          </a:xfrm>
+          <a:prstGeom prst="rect">
+            <a:avLst/>
+          </a:prstGeom>
+          <a:solidFill>
+            <a:srgbClr val="F1F5F9"/>
+          </a:solidFill>
+          <a:ln>
+            <a:solidFill>
+              <a:srgbClr val="CBD5E1"/>
+            </a:solidFill>
+          </a:ln>
+        </p:spPr>
+        <p:style>
+          <a:lnRef idx="1">
+            <a:schemeClr val="accent1"/>
+          </a:lnRef>
+          <a:fillRef idx="3">
+            <a:schemeClr val="accent1"/>
+          </a:fillRef>
+          <a:effectRef idx="2">
+            <a:schemeClr val="accent1"/>
+          </a:effectRef>
+          <a:fontRef idx="minor">
+            <a:schemeClr val="lt1"/>
+          </a:fontRef>
+        </p:style>
+        <p:txBody>
+          <a:bodyPr rtlCol="0" anchor="ctr"/>
+          <a:lstStyle/>
+          <a:p>
+            <a:pPr algn="ctr"/>
+          </a:p>
+        </p:txBody>
+      </p:sp>
+      <p:sp>
+        <p:nvSpPr>
+          <p:cNvPr id="7" name="TextBox 6"/>
+          <p:cNvSpPr txBox="1"/>
+          <p:nvPr/>
+        </p:nvSpPr>
+        <p:spPr>
+          <a:xfrm>
+            <a:off x="457200" y="6492240"/>
+            <a:ext cx="11277295" cy="320040"/>
+          </a:xfrm>
+          <a:prstGeom prst="rect">
+            <a:avLst/>
+          </a:prstGeom>
+          <a:noFill/>
+        </p:spPr>
+        <p:txBody>
+          <a:bodyPr wrap="none">
+            <a:spAutoFit/>
+          </a:bodyPr>
+          <a:lstStyle/>
+          <a:p>
+            <a:pPr>
+              <a:defRPr sz="950">
+                <a:solidFill>
+                  <a:srgbClr val="64748B"/>
+                </a:solidFill>
+                <a:latin typeface="Arial"/>
+              </a:defRPr>
+            </a:pPr>
+            <a:r>
+              <a:t>SpaceX Falcon 9 Landing Prediction | Executive Portfolio Report | Learner: alfaturachman</a:t>
+            </a:r>
+          </a:p>
+        </p:txBody>
+      </p:sp>
+      <p:sp>
+        <p:nvSpPr>
+          <p:cNvPr id="8" name="TextBox 7"/>
+          <p:cNvSpPr txBox="1"/>
+          <p:nvPr/>
+        </p:nvSpPr>
+        <p:spPr>
+          <a:xfrm>
+            <a:off x="548640" y="1005840"/>
+            <a:ext cx="11094415" cy="5303520"/>
+          </a:xfrm>
+          <a:prstGeom prst="rect">
+            <a:avLst/>
+          </a:prstGeom>
+          <a:noFill/>
+        </p:spPr>
+        <p:txBody>
+          <a:bodyPr wrap="square">
+            <a:spAutoFit/>
+          </a:bodyPr>
+          <a:lstStyle/>
+          <a:p>
+            <a:pPr>
+              <a:spcBef>
+                <a:spcPts val="0"/>
+              </a:spcBef>
+              <a:spcAft>
+                <a:spcPts val="100"/>
+              </a:spcAft>
+            </a:pPr>
+            <a:r>
+              <a:rPr b="1" sz="1200">
+                <a:solidFill>
+                  <a:srgbClr val="1B365D"/>
+                </a:solidFill>
+              </a:rPr>
+              <a:t>Asymmetric Cost Analysis of Classification Errors</a:t>
+            </a:r>
+          </a:p>
+          <a:p>
+            <a:pPr lvl="1">
+              <a:spcAft>
+                <a:spcPts val="400"/>
+              </a:spcAft>
+            </a:pPr>
+            <a:r>
+              <a:rPr sz="1050">
+                <a:solidFill>
+                  <a:srgbClr val="1E293B"/>
+                </a:solidFill>
+              </a:rPr>
+              <a:t>Zero False Negatives (FN = 0): Recovery ships and retrieval teams are never omitted when a booster lands. False Positives (FP = 3): Predicted landing, but booster crashed at sea. Triggers unrecoverable drone ship deployment costs (~$200,000 to $500,000 per mission) plus payload schedule disruption.</a:t>
+            </a:r>
+          </a:p>
+          <a:p>
+            <a:pPr>
+              <a:spcBef>
+                <a:spcPts val="400"/>
+              </a:spcBef>
+              <a:spcAft>
+                <a:spcPts val="100"/>
+              </a:spcAft>
+            </a:pPr>
+            <a:r>
+              <a:rPr b="1" sz="1200">
+                <a:solidFill>
+                  <a:srgbClr val="1B365D"/>
+                </a:solidFill>
+              </a:rPr>
+              <a:t>Cost-Sensitive Learning &amp; SMOTE</a:t>
+            </a:r>
+          </a:p>
+          <a:p>
+            <a:pPr lvl="1">
+              <a:spcAft>
+                <a:spcPts val="400"/>
+              </a:spcAft>
+            </a:pPr>
+            <a:r>
+              <a:rPr sz="1050">
+                <a:solidFill>
+                  <a:srgbClr val="1E293B"/>
+                </a:solidFill>
+              </a:rPr>
+              <a:t>Because successful landings constitute 66.7% of the dataset, models naturally bias toward success. Applying SMOTE (Synthetic Minority Over-sampling Technique) or setting class_weight='balanced' will penalize False Positives and optimize economic utility.</a:t>
+            </a:r>
+          </a:p>
+          <a:p>
+            <a:pPr>
+              <a:spcBef>
+                <a:spcPts val="400"/>
+              </a:spcBef>
+              <a:spcAft>
+                <a:spcPts val="100"/>
+              </a:spcAft>
+            </a:pPr>
+            <a:r>
+              <a:rPr b="1" sz="1200">
+                <a:solidFill>
+                  <a:srgbClr val="1B365D"/>
+                </a:solidFill>
+              </a:rPr>
+              <a:t>Creativity &amp; Enterprise Design Architecture</a:t>
+            </a:r>
+          </a:p>
+          <a:p>
+            <a:pPr lvl="1">
+              <a:spcAft>
+                <a:spcPts val="400"/>
+              </a:spcAft>
+            </a:pPr>
+            <a:r>
+              <a:rPr sz="1050">
+                <a:solidFill>
+                  <a:srgbClr val="1E293B"/>
+                </a:solidFill>
+              </a:rPr>
+              <a:t>Developed a unified corporate design system featuring high-contrast color palettes, custom geodetic distance visualizations, reactive dashboards, and direct code navigation links.</a:t>
+            </a:r>
+          </a:p>
+          <a:p>
+            <a:pPr>
+              <a:spcBef>
+                <a:spcPts val="400"/>
+              </a:spcBef>
+              <a:spcAft>
+                <a:spcPts val="100"/>
+              </a:spcAft>
+            </a:pPr>
+            <a:r>
+              <a:rPr b="1" sz="1200">
+                <a:solidFill>
+                  <a:srgbClr val="1B365D"/>
+                </a:solidFill>
+              </a:rPr>
+              <a:t>Complete Open-Source Repository</a:t>
+            </a:r>
+          </a:p>
+          <a:p>
+            <a:pPr lvl="1">
+              <a:spcAft>
+                <a:spcPts val="400"/>
+              </a:spcAft>
+            </a:pPr>
+            <a:r>
+              <a:rPr sz="1050">
+                <a:solidFill>
+                  <a:srgbClr val="1E293B"/>
+                </a:solidFill>
+              </a:rPr>
+              <a:t>All executed notebooks and scripts available at: https://github.com/Alfaturachman/IBM-Applied-Data-Science-Capstone/blob/main/</a:t>
             </a:r>
           </a:p>
         </p:txBody>
@@ -6869,20 +7793,56 @@
             <a:pPr>
               <a:defRPr sz="1100">
                 <a:solidFill>
-                  <a:srgbClr val="E2E8F0"/>
+                  <a:srgbClr val="D4AF37"/>
                 </a:solidFill>
                 <a:latin typeface="Arial"/>
               </a:defRPr>
             </a:pPr>
             <a:r>
-              <a:t>End-to-End Analytics &amp; Predictive Modeling of Falcon 9 First Stage Recovery</a:t>
-            </a:r>
-          </a:p>
-        </p:txBody>
-      </p:sp>
-      <p:sp>
-        <p:nvSpPr>
-          <p:cNvPr id="5" name="Rectangle 4"/>
+              <a:t>Data-Driven Reusability Analysis &amp; Marginal Launch Cost Optimization</a:t>
+            </a:r>
+          </a:p>
+        </p:txBody>
+      </p:sp>
+      <p:sp>
+        <p:nvSpPr>
+          <p:cNvPr id="5" name="TextBox 4"/>
+          <p:cNvSpPr txBox="1"/>
+          <p:nvPr/>
+        </p:nvSpPr>
+        <p:spPr>
+          <a:xfrm>
+            <a:off x="8412480" y="137160"/>
+            <a:ext cx="3291840" cy="548640"/>
+          </a:xfrm>
+          <a:prstGeom prst="rect">
+            <a:avLst/>
+          </a:prstGeom>
+          <a:noFill/>
+        </p:spPr>
+        <p:txBody>
+          <a:bodyPr wrap="none">
+            <a:spAutoFit/>
+          </a:bodyPr>
+          <a:lstStyle/>
+          <a:p>
+            <a:pPr>
+              <a:defRPr sz="1100" b="1">
+                <a:solidFill>
+                  <a:srgbClr val="FFFFFF"/>
+                </a:solidFill>
+                <a:latin typeface="Arial"/>
+              </a:defRPr>
+            </a:pPr>
+            <a:r>
+              <a:t>IBM Applied Data Science Capstone</a:t>
+            </a:r>
+          </a:p>
+        </p:txBody>
+      </p:sp>
+      <p:sp>
+        <p:nvSpPr>
+          <p:cNvPr id="6" name="Rectangle 5"/>
           <p:cNvSpPr/>
           <p:nvPr/>
         </p:nvSpPr>
@@ -6927,13 +7887,13 @@
       </p:sp>
       <p:sp>
         <p:nvSpPr>
-          <p:cNvPr id="6" name="TextBox 5"/>
+          <p:cNvPr id="7" name="TextBox 6"/>
           <p:cNvSpPr txBox="1"/>
           <p:nvPr/>
         </p:nvSpPr>
         <p:spPr>
           <a:xfrm>
-            <a:off x="457200" y="6473952"/>
+            <a:off x="457200" y="6492240"/>
             <a:ext cx="11277295" cy="320040"/>
           </a:xfrm>
           <a:prstGeom prst="rect">
@@ -6948,7 +7908,7 @@
           <a:lstStyle/>
           <a:p>
             <a:pPr>
-              <a:defRPr sz="1000">
+              <a:defRPr sz="950">
                 <a:solidFill>
                   <a:srgbClr val="64748B"/>
                 </a:solidFill>
@@ -6956,21 +7916,21 @@
               </a:defRPr>
             </a:pPr>
             <a:r>
-              <a:t>IBM Applied Data Science Capstone | Learner: alfaturachman | GitHub: https://github.com/alfaturachman/IBM-Applied-Data-Science-Capstone</a:t>
-            </a:r>
-          </a:p>
-        </p:txBody>
-      </p:sp>
-      <p:sp>
-        <p:nvSpPr>
-          <p:cNvPr id="7" name="TextBox 6"/>
+              <a:t>SpaceX Falcon 9 Landing Prediction | Executive Portfolio Report | Learner: alfaturachman</a:t>
+            </a:r>
+          </a:p>
+        </p:txBody>
+      </p:sp>
+      <p:sp>
+        <p:nvSpPr>
+          <p:cNvPr id="8" name="TextBox 7"/>
           <p:cNvSpPr txBox="1"/>
           <p:nvPr/>
         </p:nvSpPr>
         <p:spPr>
           <a:xfrm>
-            <a:off x="548640" y="1051560"/>
-            <a:ext cx="11094415" cy="5212080"/>
+            <a:off x="548640" y="1005840"/>
+            <a:ext cx="11094415" cy="5303520"/>
           </a:xfrm>
           <a:prstGeom prst="rect">
             <a:avLst/>
@@ -6982,170 +7942,136 @@
             <a:spAutoFit/>
           </a:bodyPr>
           <a:lstStyle/>
-          <a:p/>
           <a:p>
             <a:pPr>
               <a:spcBef>
-                <a:spcPts val="800"/>
+                <a:spcPts val="0"/>
               </a:spcBef>
               <a:spcAft>
-                <a:spcPts val="200"/>
-              </a:spcAft>
-            </a:pPr>
-            <a:r>
-              <a:rPr b="1" sz="1300">
+                <a:spcPts val="100"/>
+              </a:spcAft>
+            </a:pPr>
+            <a:r>
+              <a:rPr b="1" sz="1200">
                 <a:solidFill>
                   <a:srgbClr val="1B365D"/>
                 </a:solidFill>
               </a:rPr>
-              <a:t>Project Context &amp; Business Value</a:t>
+              <a:t>Business Context &amp; Value Proposition</a:t>
             </a:r>
           </a:p>
           <a:p>
             <a:pPr lvl="1">
               <a:spcAft>
-                <a:spcPts val="600"/>
-              </a:spcAft>
-            </a:pPr>
-            <a:r>
-              <a:rPr sz="1100">
+                <a:spcPts val="400"/>
+              </a:spcAft>
+            </a:pPr>
+            <a:r>
+              <a:rPr sz="1050">
                 <a:solidFill>
                   <a:srgbClr val="1E293B"/>
                 </a:solidFill>
               </a:rPr>
-              <a:t>SpaceX drastically reduces launch costs by reusing Falcon 9 first-stage boosters ($62M vs. $165M+ from expendable competitors). Determining booster landing outcome is essential to bid competitively on commercial payload contracts.</a:t>
+              <a:t>SpaceX advertises Falcon 9 launches at $62M compared to $165M+ from traditional aerospace competitors. Over 70% of cost savings stem directly from successful first-stage booster recovery. Predicting landing success enables competitors to dynamically bid on satellite contracts.</a:t>
             </a:r>
           </a:p>
           <a:p>
             <a:pPr>
               <a:spcBef>
-                <a:spcPts val="800"/>
+                <a:spcPts val="400"/>
               </a:spcBef>
               <a:spcAft>
-                <a:spcPts val="200"/>
-              </a:spcAft>
-            </a:pPr>
-            <a:r>
-              <a:rPr b="1" sz="1300">
+                <a:spcPts val="100"/>
+              </a:spcAft>
+            </a:pPr>
+            <a:r>
+              <a:rPr b="1" sz="1200">
                 <a:solidFill>
                   <a:srgbClr val="1B365D"/>
                 </a:solidFill>
               </a:rPr>
-              <a:t>End-to-End Methodology</a:t>
+              <a:t>Complete Analytical Pipeline</a:t>
             </a:r>
           </a:p>
           <a:p>
             <a:pPr lvl="1">
               <a:spcAft>
-                <a:spcPts val="600"/>
-              </a:spcAft>
-            </a:pPr>
-            <a:r>
-              <a:rPr sz="1100">
+                <a:spcPts val="400"/>
+              </a:spcAft>
+            </a:pPr>
+            <a:r>
+              <a:rPr sz="1050">
                 <a:solidFill>
                   <a:srgbClr val="1E293B"/>
                 </a:solidFill>
               </a:rPr>
-              <a:t>Collected 90 launches via REST API and Wikipedia web scraping (BeautifulSoup); cleaned and imputed missing PayloadMass; created binary target Class (1=Success, 0=Failure); engineered 80 features via One-Hot Encoding; performed EDA using SQLite database queries and Seaborn; built geospatial maps in Folium; developed interactive dashboards in Plotly Dash; optimized 4 classification models via GridSearchCV.</a:t>
+              <a:t>Executed end-to-end data science lifecycle: REST API automated ingestion, Wikipedia web scraping, exploratory data analysis via SQL and Seaborn, interactive geospatial Folium mapping, reactive Plotly Dash dashboard, and supervised machine learning classification.</a:t>
             </a:r>
           </a:p>
           <a:p>
             <a:pPr>
               <a:spcBef>
-                <a:spcPts val="800"/>
+                <a:spcPts val="400"/>
               </a:spcBef>
               <a:spcAft>
-                <a:spcPts val="200"/>
-              </a:spcAft>
-            </a:pPr>
-            <a:r>
-              <a:rPr b="1" sz="1300">
+                <a:spcPts val="100"/>
+              </a:spcAft>
+            </a:pPr>
+            <a:r>
+              <a:rPr b="1" sz="1200">
                 <a:solidFill>
                   <a:srgbClr val="1B365D"/>
                 </a:solidFill>
               </a:rPr>
-              <a:t>Key Quantitative Findings</a:t>
+              <a:t>Key Predictive &amp; Empirical Results</a:t>
             </a:r>
           </a:p>
           <a:p>
             <a:pPr lvl="1">
               <a:spcAft>
-                <a:spcPts val="600"/>
-              </a:spcAft>
-            </a:pPr>
-            <a:r>
-              <a:rPr sz="1100">
+                <a:spcPts val="400"/>
+              </a:spcAft>
+            </a:pPr>
+            <a:r>
+              <a:rPr sz="1050">
                 <a:solidFill>
                   <a:srgbClr val="1E293B"/>
                 </a:solidFill>
               </a:rPr>
-              <a:t>All 4 classification models (Logistic Regression, SVM, Decision Tree, KNN) achieved 83.33% accuracy on the unseen 18-sample test set (15 correct predictions).</a:t>
+              <a:t>All 4 classification models (Logistic Regression, SVM, Decision Tree, KNN) achieved identical 83.33% test accuracy (15/18 correct). KSC LC-39A was identified as the premier launch facility (76.92% success). Payloads between 2,000-4,000 kg achieved 72.7% success.</a:t>
             </a:r>
           </a:p>
           <a:p>
             <a:pPr>
               <a:spcBef>
-                <a:spcPts val="800"/>
+                <a:spcPts val="400"/>
               </a:spcBef>
               <a:spcAft>
-                <a:spcPts val="200"/>
-              </a:spcAft>
-            </a:pPr>
-            <a:r>
-              <a:rPr b="1" sz="1300">
+                <a:spcPts val="100"/>
+              </a:spcAft>
+            </a:pPr>
+            <a:r>
+              <a:rPr b="1" sz="1200">
                 <a:solidFill>
                   <a:srgbClr val="1B365D"/>
                 </a:solidFill>
               </a:rPr>
-              <a:t>Top Launch Facility</a:t>
+              <a:t>Code Repository</a:t>
             </a:r>
           </a:p>
           <a:p>
             <a:pPr lvl="1">
               <a:spcAft>
-                <a:spcPts val="600"/>
-              </a:spcAft>
-            </a:pPr>
-            <a:r>
-              <a:rPr sz="1100">
+                <a:spcPts val="400"/>
+              </a:spcAft>
+            </a:pPr>
+            <a:r>
+              <a:rPr sz="1050">
                 <a:solidFill>
                   <a:srgbClr val="1E293B"/>
                 </a:solidFill>
               </a:rPr>
-              <a:t>KSC LC-39A achieved the highest success rate (76.92%, 10 successes). Payloads between 2,000 kg and 4,000 kg recorded the highest landing success rate (72.7%).</a:t>
-            </a:r>
-          </a:p>
-          <a:p>
-            <a:pPr>
-              <a:spcBef>
-                <a:spcPts val="800"/>
-              </a:spcBef>
-              <a:spcAft>
-                <a:spcPts val="200"/>
-              </a:spcAft>
-            </a:pPr>
-            <a:r>
-              <a:rPr b="1" sz="1300">
-                <a:solidFill>
-                  <a:srgbClr val="1B365D"/>
-                </a:solidFill>
-              </a:rPr>
-              <a:t>Project Repository</a:t>
-            </a:r>
-          </a:p>
-          <a:p>
-            <a:pPr lvl="1">
-              <a:spcAft>
-                <a:spcPts val="600"/>
-              </a:spcAft>
-            </a:pPr>
-            <a:r>
-              <a:rPr sz="1100">
-                <a:solidFill>
-                  <a:srgbClr val="1E293B"/>
-                </a:solidFill>
-              </a:rPr>
-              <a:t>Full code, notebooks, and database available at: https://github.com/alfaturachman/IBM-Applied-Data-Science-Capstone</a:t>
+              <a:t>All completed code artifacts and interactive dashboards available at: https://github.com/Alfaturachman/IBM-Applied-Data-Science-Capstone/blob/main/</a:t>
             </a:r>
           </a:p>
         </p:txBody>
@@ -7289,27 +8215,63 @@
               </a:defRPr>
             </a:pPr>
             <a:r>
-              <a:t>Project Introduction &amp; Problem Statement</a:t>
+              <a:t>Introduction &amp; Problem Statement</a:t>
             </a:r>
           </a:p>
           <a:p>
             <a:pPr>
               <a:defRPr sz="1100">
                 <a:solidFill>
-                  <a:srgbClr val="E2E8F0"/>
+                  <a:srgbClr val="D4AF37"/>
                 </a:solidFill>
                 <a:latin typeface="Arial"/>
               </a:defRPr>
             </a:pPr>
             <a:r>
-              <a:t>Commercial Background, Value Proposition, and Machine Learning Formulation</a:t>
-            </a:r>
-          </a:p>
-        </p:txBody>
-      </p:sp>
-      <p:sp>
-        <p:nvSpPr>
-          <p:cNvPr id="5" name="Rectangle 4"/>
+              <a:t>Understanding the Mechanics of First-Stage Booster Reusability</a:t>
+            </a:r>
+          </a:p>
+        </p:txBody>
+      </p:sp>
+      <p:sp>
+        <p:nvSpPr>
+          <p:cNvPr id="5" name="TextBox 4"/>
+          <p:cNvSpPr txBox="1"/>
+          <p:nvPr/>
+        </p:nvSpPr>
+        <p:spPr>
+          <a:xfrm>
+            <a:off x="8412480" y="137160"/>
+            <a:ext cx="3291840" cy="548640"/>
+          </a:xfrm>
+          <a:prstGeom prst="rect">
+            <a:avLst/>
+          </a:prstGeom>
+          <a:noFill/>
+        </p:spPr>
+        <p:txBody>
+          <a:bodyPr wrap="none">
+            <a:spAutoFit/>
+          </a:bodyPr>
+          <a:lstStyle/>
+          <a:p>
+            <a:pPr>
+              <a:defRPr sz="1100" b="1">
+                <a:solidFill>
+                  <a:srgbClr val="FFFFFF"/>
+                </a:solidFill>
+                <a:latin typeface="Arial"/>
+              </a:defRPr>
+            </a:pPr>
+            <a:r>
+              <a:t>IBM Applied Data Science Capstone</a:t>
+            </a:r>
+          </a:p>
+        </p:txBody>
+      </p:sp>
+      <p:sp>
+        <p:nvSpPr>
+          <p:cNvPr id="6" name="Rectangle 5"/>
           <p:cNvSpPr/>
           <p:nvPr/>
         </p:nvSpPr>
@@ -7354,13 +8316,13 @@
       </p:sp>
       <p:sp>
         <p:nvSpPr>
-          <p:cNvPr id="6" name="TextBox 5"/>
+          <p:cNvPr id="7" name="TextBox 6"/>
           <p:cNvSpPr txBox="1"/>
           <p:nvPr/>
         </p:nvSpPr>
         <p:spPr>
           <a:xfrm>
-            <a:off x="457200" y="6473952"/>
+            <a:off x="457200" y="6492240"/>
             <a:ext cx="11277295" cy="320040"/>
           </a:xfrm>
           <a:prstGeom prst="rect">
@@ -7375,7 +8337,7 @@
           <a:lstStyle/>
           <a:p>
             <a:pPr>
-              <a:defRPr sz="1000">
+              <a:defRPr sz="950">
                 <a:solidFill>
                   <a:srgbClr val="64748B"/>
                 </a:solidFill>
@@ -7383,21 +8345,21 @@
               </a:defRPr>
             </a:pPr>
             <a:r>
-              <a:t>IBM Applied Data Science Capstone | Learner: alfaturachman | GitHub: https://github.com/alfaturachman/IBM-Applied-Data-Science-Capstone</a:t>
-            </a:r>
-          </a:p>
-        </p:txBody>
-      </p:sp>
-      <p:sp>
-        <p:nvSpPr>
-          <p:cNvPr id="7" name="TextBox 6"/>
+              <a:t>SpaceX Falcon 9 Landing Prediction | Executive Portfolio Report | Learner: alfaturachman</a:t>
+            </a:r>
+          </a:p>
+        </p:txBody>
+      </p:sp>
+      <p:sp>
+        <p:nvSpPr>
+          <p:cNvPr id="8" name="TextBox 7"/>
           <p:cNvSpPr txBox="1"/>
           <p:nvPr/>
         </p:nvSpPr>
         <p:spPr>
           <a:xfrm>
-            <a:off x="548640" y="1051560"/>
-            <a:ext cx="6217920" cy="5212080"/>
+            <a:off x="548640" y="1005840"/>
+            <a:ext cx="6217920" cy="5303520"/>
           </a:xfrm>
           <a:prstGeom prst="rect">
             <a:avLst/>
@@ -7409,14 +8371,13 @@
             <a:spAutoFit/>
           </a:bodyPr>
           <a:lstStyle/>
-          <a:p/>
           <a:p>
             <a:pPr>
               <a:spcBef>
-                <a:spcPts val="600"/>
+                <a:spcPts val="0"/>
               </a:spcBef>
               <a:spcAft>
-                <a:spcPts val="200"/>
+                <a:spcPts val="100"/>
               </a:spcAft>
             </a:pPr>
             <a:r>
@@ -7425,7 +8386,7 @@
                   <a:srgbClr val="1B365D"/>
                 </a:solidFill>
               </a:rPr>
-              <a:t>Commercial Launch Disruption</a:t>
+              <a:t>First Stage Economics</a:t>
             </a:r>
           </a:p>
           <a:p>
@@ -7435,21 +8396,21 @@
               </a:spcAft>
             </a:pPr>
             <a:r>
-              <a:rPr sz="1050">
+              <a:rPr sz="1000">
                 <a:solidFill>
                   <a:srgbClr val="1E293B"/>
                 </a:solidFill>
               </a:rPr>
-              <a:t>SpaceX offers Falcon 9 commercial launches at ~$62M, saving clients over $100M compared to traditional aerospace providers.</a:t>
+              <a:t>Over 70% of rocket construction costs are concentrated in the first-stage booster, including 9 Merlin 1D engines and titanium grid fins.</a:t>
             </a:r>
           </a:p>
           <a:p>
             <a:pPr>
               <a:spcBef>
-                <a:spcPts val="600"/>
+                <a:spcPts val="400"/>
               </a:spcBef>
               <a:spcAft>
-                <a:spcPts val="200"/>
+                <a:spcPts val="100"/>
               </a:spcAft>
             </a:pPr>
             <a:r>
@@ -7458,7 +8419,7 @@
                   <a:srgbClr val="1B365D"/>
                 </a:solidFill>
               </a:rPr>
-              <a:t>First Stage Dominance</a:t>
+              <a:t>The Aerospace Bidding Dilemma</a:t>
             </a:r>
           </a:p>
           <a:p>
@@ -7468,21 +8429,21 @@
               </a:spcAft>
             </a:pPr>
             <a:r>
-              <a:rPr sz="1050">
+              <a:rPr sz="1000">
                 <a:solidFill>
                   <a:srgbClr val="1E293B"/>
                 </a:solidFill>
               </a:rPr>
-              <a:t>Over 70% of total rocket construction cost is concentrated in the first-stage booster, including nine Merlin 1D engines and titanium grid fins.</a:t>
+              <a:t>Traditional aerospace competitors must price launches based on single-use expendable rockets. Determining SpaceX's recovery probability accurately reveals their marginal launch cost basis ($62M vs $165M+).</a:t>
             </a:r>
           </a:p>
           <a:p>
             <a:pPr>
               <a:spcBef>
-                <a:spcPts val="600"/>
+                <a:spcPts val="400"/>
               </a:spcBef>
               <a:spcAft>
-                <a:spcPts val="200"/>
+                <a:spcPts val="100"/>
               </a:spcAft>
             </a:pPr>
             <a:r>
@@ -7491,7 +8452,7 @@
                   <a:srgbClr val="1B365D"/>
                 </a:solidFill>
               </a:rPr>
-              <a:t>The Business Problem</a:t>
+              <a:t>Machine Learning Formulation</a:t>
             </a:r>
           </a:p>
           <a:p>
@@ -7501,21 +8462,21 @@
               </a:spcAft>
             </a:pPr>
             <a:r>
-              <a:rPr sz="1050">
+              <a:rPr sz="1000">
                 <a:solidFill>
                   <a:srgbClr val="1E293B"/>
                 </a:solidFill>
               </a:rPr>
-              <a:t>Competing aerospace firms need to accurately estimate SpaceX's launch costs. Predicting whether the first stage will land safely determines if SpaceX achieves a $62M cost basis or absorbs an expendable launch cost.</a:t>
+              <a:t>Supervised Binary Classification problem. Target variable Y is Class (1 = Successful Landing, 0 = Failed Landing). Feature matrix X contains 80 numeric attributes after one-hot encoding.</a:t>
             </a:r>
           </a:p>
           <a:p>
             <a:pPr>
               <a:spcBef>
-                <a:spcPts val="600"/>
+                <a:spcPts val="400"/>
               </a:spcBef>
               <a:spcAft>
-                <a:spcPts val="200"/>
+                <a:spcPts val="100"/>
               </a:spcAft>
             </a:pPr>
             <a:r>
@@ -7524,7 +8485,7 @@
                   <a:srgbClr val="1B365D"/>
                 </a:solidFill>
               </a:rPr>
-              <a:t>Machine Learning Problem Formulation</a:t>
+              <a:t>Lab Notebook URL</a:t>
             </a:r>
           </a:p>
           <a:p>
@@ -7534,19 +8495,19 @@
               </a:spcAft>
             </a:pPr>
             <a:r>
-              <a:rPr sz="1050">
+              <a:rPr sz="1000">
                 <a:solidFill>
                   <a:srgbClr val="1E293B"/>
                 </a:solidFill>
               </a:rPr>
-              <a:t>Supervised Binary Classification problem. Target variable Y is Class (1 = Successful Landing, 0 = Failed Landing). Feature matrix X contains 80 numeric attributes.</a:t>
+              <a:t>Full project repository: https://github.com/Alfaturachman/IBM-Applied-Data-Science-Capstone/blob/main/</a:t>
             </a:r>
           </a:p>
         </p:txBody>
       </p:sp>
       <p:pic>
         <p:nvPicPr>
-          <p:cNvPr id="8" name="Picture 7" descr="eda_trend.png"/>
+          <p:cNvPr id="9" name="Picture 8" descr="eda_trend.png"/>
           <p:cNvPicPr>
             <a:picLocks noChangeAspect="1"/>
           </p:cNvPicPr>
@@ -7560,7 +8521,7 @@
         </p:blipFill>
         <p:spPr>
           <a:xfrm>
-            <a:off x="6949440" y="1280160"/>
+            <a:off x="6949440" y="1188720"/>
             <a:ext cx="4754880" cy="2377440"/>
           </a:xfrm>
           <a:prstGeom prst="rect">
@@ -7714,7 +8675,7 @@
             <a:pPr>
               <a:defRPr sz="1100">
                 <a:solidFill>
-                  <a:srgbClr val="E2E8F0"/>
+                  <a:srgbClr val="D4AF37"/>
                 </a:solidFill>
                 <a:latin typeface="Arial"/>
               </a:defRPr>
@@ -7727,7 +8688,43 @@
       </p:sp>
       <p:sp>
         <p:nvSpPr>
-          <p:cNvPr id="5" name="Rectangle 4"/>
+          <p:cNvPr id="5" name="TextBox 4"/>
+          <p:cNvSpPr txBox="1"/>
+          <p:nvPr/>
+        </p:nvSpPr>
+        <p:spPr>
+          <a:xfrm>
+            <a:off x="8412480" y="137160"/>
+            <a:ext cx="3291840" cy="548640"/>
+          </a:xfrm>
+          <a:prstGeom prst="rect">
+            <a:avLst/>
+          </a:prstGeom>
+          <a:noFill/>
+        </p:spPr>
+        <p:txBody>
+          <a:bodyPr wrap="none">
+            <a:spAutoFit/>
+          </a:bodyPr>
+          <a:lstStyle/>
+          <a:p>
+            <a:pPr>
+              <a:defRPr sz="1100" b="1">
+                <a:solidFill>
+                  <a:srgbClr val="FFFFFF"/>
+                </a:solidFill>
+                <a:latin typeface="Arial"/>
+              </a:defRPr>
+            </a:pPr>
+            <a:r>
+              <a:t>IBM Applied Data Science Capstone</a:t>
+            </a:r>
+          </a:p>
+        </p:txBody>
+      </p:sp>
+      <p:sp>
+        <p:nvSpPr>
+          <p:cNvPr id="6" name="Rectangle 5"/>
           <p:cNvSpPr/>
           <p:nvPr/>
         </p:nvSpPr>
@@ -7772,13 +8769,13 @@
       </p:sp>
       <p:sp>
         <p:nvSpPr>
-          <p:cNvPr id="6" name="TextBox 5"/>
+          <p:cNvPr id="7" name="TextBox 6"/>
           <p:cNvSpPr txBox="1"/>
           <p:nvPr/>
         </p:nvSpPr>
         <p:spPr>
           <a:xfrm>
-            <a:off x="457200" y="6473952"/>
+            <a:off x="457200" y="6492240"/>
             <a:ext cx="11277295" cy="320040"/>
           </a:xfrm>
           <a:prstGeom prst="rect">
@@ -7793,7 +8790,7 @@
           <a:lstStyle/>
           <a:p>
             <a:pPr>
-              <a:defRPr sz="1000">
+              <a:defRPr sz="950">
                 <a:solidFill>
                   <a:srgbClr val="64748B"/>
                 </a:solidFill>
@@ -7801,21 +8798,21 @@
               </a:defRPr>
             </a:pPr>
             <a:r>
-              <a:t>IBM Applied Data Science Capstone | Learner: alfaturachman | GitHub: https://github.com/alfaturachman/IBM-Applied-Data-Science-Capstone</a:t>
-            </a:r>
-          </a:p>
-        </p:txBody>
-      </p:sp>
-      <p:sp>
-        <p:nvSpPr>
-          <p:cNvPr id="7" name="TextBox 6"/>
+              <a:t>SpaceX Falcon 9 Landing Prediction | Executive Portfolio Report | Learner: alfaturachman</a:t>
+            </a:r>
+          </a:p>
+        </p:txBody>
+      </p:sp>
+      <p:sp>
+        <p:nvSpPr>
+          <p:cNvPr id="8" name="TextBox 7"/>
           <p:cNvSpPr txBox="1"/>
           <p:nvPr/>
         </p:nvSpPr>
         <p:spPr>
           <a:xfrm>
-            <a:off x="548640" y="1051560"/>
-            <a:ext cx="11094415" cy="5212080"/>
+            <a:off x="548640" y="1005840"/>
+            <a:ext cx="11094415" cy="5303520"/>
           </a:xfrm>
           <a:prstGeom prst="rect">
             <a:avLst/>
@@ -7827,18 +8824,17 @@
             <a:spAutoFit/>
           </a:bodyPr>
           <a:lstStyle/>
-          <a:p/>
           <a:p>
             <a:pPr>
               <a:spcBef>
-                <a:spcPts val="800"/>
+                <a:spcPts val="0"/>
               </a:spcBef>
               <a:spcAft>
-                <a:spcPts val="200"/>
-              </a:spcAft>
-            </a:pPr>
-            <a:r>
-              <a:rPr b="1" sz="1300">
+                <a:spcPts val="100"/>
+              </a:spcAft>
+            </a:pPr>
+            <a:r>
+              <a:rPr b="1" sz="1200">
                 <a:solidFill>
                   <a:srgbClr val="1B365D"/>
                 </a:solidFill>
@@ -7849,11 +8845,11 @@
           <a:p>
             <a:pPr lvl="1">
               <a:spcAft>
-                <a:spcPts val="600"/>
-              </a:spcAft>
-            </a:pPr>
-            <a:r>
-              <a:rPr sz="1100">
+                <a:spcPts val="400"/>
+              </a:spcAft>
+            </a:pPr>
+            <a:r>
+              <a:rPr sz="1050">
                 <a:solidFill>
                   <a:srgbClr val="1E293B"/>
                 </a:solidFill>
@@ -7864,14 +8860,14 @@
           <a:p>
             <a:pPr>
               <a:spcBef>
-                <a:spcPts val="800"/>
+                <a:spcPts val="400"/>
               </a:spcBef>
               <a:spcAft>
-                <a:spcPts val="200"/>
-              </a:spcAft>
-            </a:pPr>
-            <a:r>
-              <a:rPr b="1" sz="1300">
+                <a:spcPts val="100"/>
+              </a:spcAft>
+            </a:pPr>
+            <a:r>
+              <a:rPr b="1" sz="1200">
                 <a:solidFill>
                   <a:srgbClr val="1B365D"/>
                 </a:solidFill>
@@ -7882,11 +8878,11 @@
           <a:p>
             <a:pPr lvl="1">
               <a:spcAft>
-                <a:spcPts val="600"/>
-              </a:spcAft>
-            </a:pPr>
-            <a:r>
-              <a:rPr sz="1100">
+                <a:spcPts val="400"/>
+              </a:spcAft>
+            </a:pPr>
+            <a:r>
+              <a:rPr sz="1050">
                 <a:solidFill>
                   <a:srgbClr val="1E293B"/>
                 </a:solidFill>
@@ -7897,14 +8893,14 @@
           <a:p>
             <a:pPr>
               <a:spcBef>
-                <a:spcPts val="800"/>
+                <a:spcPts val="400"/>
               </a:spcBef>
               <a:spcAft>
-                <a:spcPts val="200"/>
-              </a:spcAft>
-            </a:pPr>
-            <a:r>
-              <a:rPr b="1" sz="1300">
+                <a:spcPts val="100"/>
+              </a:spcAft>
+            </a:pPr>
+            <a:r>
+              <a:rPr b="1" sz="1200">
                 <a:solidFill>
                   <a:srgbClr val="1B365D"/>
                 </a:solidFill>
@@ -7915,11 +8911,11 @@
           <a:p>
             <a:pPr lvl="1">
               <a:spcAft>
-                <a:spcPts val="600"/>
-              </a:spcAft>
-            </a:pPr>
-            <a:r>
-              <a:rPr sz="1100">
+                <a:spcPts val="400"/>
+              </a:spcAft>
+            </a:pPr>
+            <a:r>
+              <a:rPr sz="1050">
                 <a:solidFill>
                   <a:srgbClr val="1E293B"/>
                 </a:solidFill>
@@ -7930,14 +8926,14 @@
           <a:p>
             <a:pPr>
               <a:spcBef>
-                <a:spcPts val="800"/>
+                <a:spcPts val="400"/>
               </a:spcBef>
               <a:spcAft>
-                <a:spcPts val="200"/>
-              </a:spcAft>
-            </a:pPr>
-            <a:r>
-              <a:rPr b="1" sz="1300">
+                <a:spcPts val="100"/>
+              </a:spcAft>
+            </a:pPr>
+            <a:r>
+              <a:rPr b="1" sz="1200">
                 <a:solidFill>
                   <a:srgbClr val="1B365D"/>
                 </a:solidFill>
@@ -7948,11 +8944,11 @@
           <a:p>
             <a:pPr lvl="1">
               <a:spcAft>
-                <a:spcPts val="600"/>
-              </a:spcAft>
-            </a:pPr>
-            <a:r>
-              <a:rPr sz="1100">
+                <a:spcPts val="400"/>
+              </a:spcAft>
+            </a:pPr>
+            <a:r>
+              <a:rPr sz="1050">
                 <a:solidFill>
                   <a:srgbClr val="1E293B"/>
                 </a:solidFill>
@@ -7963,34 +8959,34 @@
           <a:p>
             <a:pPr>
               <a:spcBef>
-                <a:spcPts val="800"/>
+                <a:spcPts val="400"/>
               </a:spcBef>
               <a:spcAft>
-                <a:spcPts val="200"/>
-              </a:spcAft>
-            </a:pPr>
-            <a:r>
-              <a:rPr b="1" sz="1300">
+                <a:spcPts val="100"/>
+              </a:spcAft>
+            </a:pPr>
+            <a:r>
+              <a:rPr b="1" sz="1200">
                 <a:solidFill>
                   <a:srgbClr val="1B365D"/>
                 </a:solidFill>
               </a:rPr>
-              <a:t>Code Repository</a:t>
+              <a:t>Lab Code URL</a:t>
             </a:r>
           </a:p>
           <a:p>
             <a:pPr lvl="1">
               <a:spcAft>
-                <a:spcPts val="600"/>
-              </a:spcAft>
-            </a:pPr>
-            <a:r>
-              <a:rPr sz="1100">
+                <a:spcPts val="400"/>
+              </a:spcAft>
+            </a:pPr>
+            <a:r>
+              <a:rPr sz="1050">
                 <a:solidFill>
                   <a:srgbClr val="1E293B"/>
                 </a:solidFill>
               </a:rPr>
-              <a:t>Full API extraction notebook available at: https://github.com/alfaturachman/IBM-Applied-Data-Science-Capstone</a:t>
+              <a:t>Dedicated API Notebook: https://github.com/Alfaturachman/IBM-Applied-Data-Science-Capstone/blob/main/jupyter-labs-spacex-data-collection-api-v2.ipynb</a:t>
             </a:r>
           </a:p>
         </p:txBody>
@@ -8141,7 +9137,7 @@
             <a:pPr>
               <a:defRPr sz="1100">
                 <a:solidFill>
-                  <a:srgbClr val="E2E8F0"/>
+                  <a:srgbClr val="D4AF37"/>
                 </a:solidFill>
                 <a:latin typeface="Arial"/>
               </a:defRPr>
@@ -8154,7 +9150,43 @@
       </p:sp>
       <p:sp>
         <p:nvSpPr>
-          <p:cNvPr id="5" name="Rectangle 4"/>
+          <p:cNvPr id="5" name="TextBox 4"/>
+          <p:cNvSpPr txBox="1"/>
+          <p:nvPr/>
+        </p:nvSpPr>
+        <p:spPr>
+          <a:xfrm>
+            <a:off x="8412480" y="137160"/>
+            <a:ext cx="3291840" cy="548640"/>
+          </a:xfrm>
+          <a:prstGeom prst="rect">
+            <a:avLst/>
+          </a:prstGeom>
+          <a:noFill/>
+        </p:spPr>
+        <p:txBody>
+          <a:bodyPr wrap="none">
+            <a:spAutoFit/>
+          </a:bodyPr>
+          <a:lstStyle/>
+          <a:p>
+            <a:pPr>
+              <a:defRPr sz="1100" b="1">
+                <a:solidFill>
+                  <a:srgbClr val="FFFFFF"/>
+                </a:solidFill>
+                <a:latin typeface="Arial"/>
+              </a:defRPr>
+            </a:pPr>
+            <a:r>
+              <a:t>IBM Applied Data Science Capstone</a:t>
+            </a:r>
+          </a:p>
+        </p:txBody>
+      </p:sp>
+      <p:sp>
+        <p:nvSpPr>
+          <p:cNvPr id="6" name="Rectangle 5"/>
           <p:cNvSpPr/>
           <p:nvPr/>
         </p:nvSpPr>
@@ -8199,13 +9231,13 @@
       </p:sp>
       <p:sp>
         <p:nvSpPr>
-          <p:cNvPr id="6" name="TextBox 5"/>
+          <p:cNvPr id="7" name="TextBox 6"/>
           <p:cNvSpPr txBox="1"/>
           <p:nvPr/>
         </p:nvSpPr>
         <p:spPr>
           <a:xfrm>
-            <a:off x="457200" y="6473952"/>
+            <a:off x="457200" y="6492240"/>
             <a:ext cx="11277295" cy="320040"/>
           </a:xfrm>
           <a:prstGeom prst="rect">
@@ -8220,7 +9252,7 @@
           <a:lstStyle/>
           <a:p>
             <a:pPr>
-              <a:defRPr sz="1000">
+              <a:defRPr sz="950">
                 <a:solidFill>
                   <a:srgbClr val="64748B"/>
                 </a:solidFill>
@@ -8228,21 +9260,21 @@
               </a:defRPr>
             </a:pPr>
             <a:r>
-              <a:t>IBM Applied Data Science Capstone | Learner: alfaturachman | GitHub: https://github.com/alfaturachman/IBM-Applied-Data-Science-Capstone</a:t>
-            </a:r>
-          </a:p>
-        </p:txBody>
-      </p:sp>
-      <p:sp>
-        <p:nvSpPr>
-          <p:cNvPr id="7" name="TextBox 6"/>
+              <a:t>SpaceX Falcon 9 Landing Prediction | Executive Portfolio Report | Learner: alfaturachman</a:t>
+            </a:r>
+          </a:p>
+        </p:txBody>
+      </p:sp>
+      <p:sp>
+        <p:nvSpPr>
+          <p:cNvPr id="8" name="TextBox 7"/>
           <p:cNvSpPr txBox="1"/>
           <p:nvPr/>
         </p:nvSpPr>
         <p:spPr>
           <a:xfrm>
-            <a:off x="548640" y="1051560"/>
-            <a:ext cx="11094415" cy="5212080"/>
+            <a:off x="548640" y="1005840"/>
+            <a:ext cx="11094415" cy="5303520"/>
           </a:xfrm>
           <a:prstGeom prst="rect">
             <a:avLst/>
@@ -8254,18 +9286,17 @@
             <a:spAutoFit/>
           </a:bodyPr>
           <a:lstStyle/>
-          <a:p/>
           <a:p>
             <a:pPr>
               <a:spcBef>
-                <a:spcPts val="800"/>
+                <a:spcPts val="0"/>
               </a:spcBef>
               <a:spcAft>
-                <a:spcPts val="200"/>
-              </a:spcAft>
-            </a:pPr>
-            <a:r>
-              <a:rPr b="1" sz="1300">
+                <a:spcPts val="100"/>
+              </a:spcAft>
+            </a:pPr>
+            <a:r>
+              <a:rPr b="1" sz="1200">
                 <a:solidFill>
                   <a:srgbClr val="1B365D"/>
                 </a:solidFill>
@@ -8276,11 +9307,11 @@
           <a:p>
             <a:pPr lvl="1">
               <a:spcAft>
-                <a:spcPts val="600"/>
-              </a:spcAft>
-            </a:pPr>
-            <a:r>
-              <a:rPr sz="1100">
+                <a:spcPts val="400"/>
+              </a:spcAft>
+            </a:pPr>
+            <a:r>
+              <a:rPr sz="1050">
                 <a:solidFill>
                   <a:srgbClr val="1E293B"/>
                 </a:solidFill>
@@ -8291,14 +9322,14 @@
           <a:p>
             <a:pPr>
               <a:spcBef>
-                <a:spcPts val="800"/>
+                <a:spcPts val="400"/>
               </a:spcBef>
               <a:spcAft>
-                <a:spcPts val="200"/>
-              </a:spcAft>
-            </a:pPr>
-            <a:r>
-              <a:rPr b="1" sz="1300">
+                <a:spcPts val="100"/>
+              </a:spcAft>
+            </a:pPr>
+            <a:r>
+              <a:rPr b="1" sz="1200">
                 <a:solidFill>
                   <a:srgbClr val="1B365D"/>
                 </a:solidFill>
@@ -8309,11 +9340,11 @@
           <a:p>
             <a:pPr lvl="1">
               <a:spcAft>
-                <a:spcPts val="600"/>
-              </a:spcAft>
-            </a:pPr>
-            <a:r>
-              <a:rPr sz="1100">
+                <a:spcPts val="400"/>
+              </a:spcAft>
+            </a:pPr>
+            <a:r>
+              <a:rPr sz="1050">
                 <a:solidFill>
                   <a:srgbClr val="1E293B"/>
                 </a:solidFill>
@@ -8324,14 +9355,14 @@
           <a:p>
             <a:pPr>
               <a:spcBef>
-                <a:spcPts val="800"/>
+                <a:spcPts val="400"/>
               </a:spcBef>
               <a:spcAft>
-                <a:spcPts val="200"/>
-              </a:spcAft>
-            </a:pPr>
-            <a:r>
-              <a:rPr b="1" sz="1300">
+                <a:spcPts val="100"/>
+              </a:spcAft>
+            </a:pPr>
+            <a:r>
+              <a:rPr b="1" sz="1200">
                 <a:solidFill>
                   <a:srgbClr val="1B365D"/>
                 </a:solidFill>
@@ -8342,11 +9373,11 @@
           <a:p>
             <a:pPr lvl="1">
               <a:spcAft>
-                <a:spcPts val="600"/>
-              </a:spcAft>
-            </a:pPr>
-            <a:r>
-              <a:rPr sz="1100">
+                <a:spcPts val="400"/>
+              </a:spcAft>
+            </a:pPr>
+            <a:r>
+              <a:rPr sz="1050">
                 <a:solidFill>
                   <a:srgbClr val="1E293B"/>
                 </a:solidFill>
@@ -8357,14 +9388,14 @@
           <a:p>
             <a:pPr>
               <a:spcBef>
-                <a:spcPts val="800"/>
+                <a:spcPts val="400"/>
               </a:spcBef>
               <a:spcAft>
-                <a:spcPts val="200"/>
-              </a:spcAft>
-            </a:pPr>
-            <a:r>
-              <a:rPr b="1" sz="1300">
+                <a:spcPts val="100"/>
+              </a:spcAft>
+            </a:pPr>
+            <a:r>
+              <a:rPr b="1" sz="1200">
                 <a:solidFill>
                   <a:srgbClr val="1B365D"/>
                 </a:solidFill>
@@ -8375,11 +9406,11 @@
           <a:p>
             <a:pPr lvl="1">
               <a:spcAft>
-                <a:spcPts val="600"/>
-              </a:spcAft>
-            </a:pPr>
-            <a:r>
-              <a:rPr sz="1100">
+                <a:spcPts val="400"/>
+              </a:spcAft>
+            </a:pPr>
+            <a:r>
+              <a:rPr sz="1050">
                 <a:solidFill>
                   <a:srgbClr val="1E293B"/>
                 </a:solidFill>
@@ -8390,34 +9421,34 @@
           <a:p>
             <a:pPr>
               <a:spcBef>
-                <a:spcPts val="800"/>
+                <a:spcPts val="400"/>
               </a:spcBef>
               <a:spcAft>
-                <a:spcPts val="200"/>
-              </a:spcAft>
-            </a:pPr>
-            <a:r>
-              <a:rPr b="1" sz="1300">
+                <a:spcPts val="100"/>
+              </a:spcAft>
+            </a:pPr>
+            <a:r>
+              <a:rPr b="1" sz="1200">
                 <a:solidFill>
                   <a:srgbClr val="1B365D"/>
                 </a:solidFill>
               </a:rPr>
-              <a:t>Code Repository</a:t>
+              <a:t>Lab Code URL</a:t>
             </a:r>
           </a:p>
           <a:p>
             <a:pPr lvl="1">
               <a:spcAft>
-                <a:spcPts val="600"/>
-              </a:spcAft>
-            </a:pPr>
-            <a:r>
-              <a:rPr sz="1100">
+                <a:spcPts val="400"/>
+              </a:spcAft>
+            </a:pPr>
+            <a:r>
+              <a:rPr sz="1050">
                 <a:solidFill>
                   <a:srgbClr val="1E293B"/>
                 </a:solidFill>
               </a:rPr>
-              <a:t>Full scraping notebook available at: https://github.com/alfaturachman/IBM-Applied-Data-Science-Capstone</a:t>
+              <a:t>Dedicated Web Scraping Notebook: https://github.com/Alfaturachman/IBM-Applied-Data-Science-Capstone/blob/main/jupyter-labs-webscraping.ipynb</a:t>
             </a:r>
           </a:p>
         </p:txBody>
@@ -8568,7 +9599,7 @@
             <a:pPr>
               <a:defRPr sz="1100">
                 <a:solidFill>
-                  <a:srgbClr val="E2E8F0"/>
+                  <a:srgbClr val="D4AF37"/>
                 </a:solidFill>
                 <a:latin typeface="Arial"/>
               </a:defRPr>
@@ -8581,7 +9612,43 @@
       </p:sp>
       <p:sp>
         <p:nvSpPr>
-          <p:cNvPr id="5" name="Rectangle 4"/>
+          <p:cNvPr id="5" name="TextBox 4"/>
+          <p:cNvSpPr txBox="1"/>
+          <p:nvPr/>
+        </p:nvSpPr>
+        <p:spPr>
+          <a:xfrm>
+            <a:off x="8412480" y="137160"/>
+            <a:ext cx="3291840" cy="548640"/>
+          </a:xfrm>
+          <a:prstGeom prst="rect">
+            <a:avLst/>
+          </a:prstGeom>
+          <a:noFill/>
+        </p:spPr>
+        <p:txBody>
+          <a:bodyPr wrap="none">
+            <a:spAutoFit/>
+          </a:bodyPr>
+          <a:lstStyle/>
+          <a:p>
+            <a:pPr>
+              <a:defRPr sz="1100" b="1">
+                <a:solidFill>
+                  <a:srgbClr val="FFFFFF"/>
+                </a:solidFill>
+                <a:latin typeface="Arial"/>
+              </a:defRPr>
+            </a:pPr>
+            <a:r>
+              <a:t>IBM Applied Data Science Capstone</a:t>
+            </a:r>
+          </a:p>
+        </p:txBody>
+      </p:sp>
+      <p:sp>
+        <p:nvSpPr>
+          <p:cNvPr id="6" name="Rectangle 5"/>
           <p:cNvSpPr/>
           <p:nvPr/>
         </p:nvSpPr>
@@ -8626,13 +9693,13 @@
       </p:sp>
       <p:sp>
         <p:nvSpPr>
-          <p:cNvPr id="6" name="TextBox 5"/>
+          <p:cNvPr id="7" name="TextBox 6"/>
           <p:cNvSpPr txBox="1"/>
           <p:nvPr/>
         </p:nvSpPr>
         <p:spPr>
           <a:xfrm>
-            <a:off x="457200" y="6473952"/>
+            <a:off x="457200" y="6492240"/>
             <a:ext cx="11277295" cy="320040"/>
           </a:xfrm>
           <a:prstGeom prst="rect">
@@ -8647,7 +9714,7 @@
           <a:lstStyle/>
           <a:p>
             <a:pPr>
-              <a:defRPr sz="1000">
+              <a:defRPr sz="950">
                 <a:solidFill>
                   <a:srgbClr val="64748B"/>
                 </a:solidFill>
@@ -8655,21 +9722,21 @@
               </a:defRPr>
             </a:pPr>
             <a:r>
-              <a:t>IBM Applied Data Science Capstone | Learner: alfaturachman | GitHub: https://github.com/alfaturachman/IBM-Applied-Data-Science-Capstone</a:t>
-            </a:r>
-          </a:p>
-        </p:txBody>
-      </p:sp>
-      <p:sp>
-        <p:nvSpPr>
-          <p:cNvPr id="7" name="TextBox 6"/>
+              <a:t>SpaceX Falcon 9 Landing Prediction | Executive Portfolio Report | Learner: alfaturachman</a:t>
+            </a:r>
+          </a:p>
+        </p:txBody>
+      </p:sp>
+      <p:sp>
+        <p:nvSpPr>
+          <p:cNvPr id="8" name="TextBox 7"/>
           <p:cNvSpPr txBox="1"/>
           <p:nvPr/>
         </p:nvSpPr>
         <p:spPr>
           <a:xfrm>
-            <a:off x="548640" y="1051560"/>
-            <a:ext cx="11094415" cy="5212080"/>
+            <a:off x="548640" y="1005840"/>
+            <a:ext cx="11094415" cy="5303520"/>
           </a:xfrm>
           <a:prstGeom prst="rect">
             <a:avLst/>
@@ -8681,18 +9748,17 @@
             <a:spAutoFit/>
           </a:bodyPr>
           <a:lstStyle/>
-          <a:p/>
           <a:p>
             <a:pPr>
               <a:spcBef>
-                <a:spcPts val="800"/>
+                <a:spcPts val="0"/>
               </a:spcBef>
               <a:spcAft>
-                <a:spcPts val="200"/>
-              </a:spcAft>
-            </a:pPr>
-            <a:r>
-              <a:rPr b="1" sz="1300">
+                <a:spcPts val="100"/>
+              </a:spcAft>
+            </a:pPr>
+            <a:r>
+              <a:rPr b="1" sz="1200">
                 <a:solidFill>
                   <a:srgbClr val="1B365D"/>
                 </a:solidFill>
@@ -8703,11 +9769,11 @@
           <a:p>
             <a:pPr lvl="1">
               <a:spcAft>
-                <a:spcPts val="600"/>
-              </a:spcAft>
-            </a:pPr>
-            <a:r>
-              <a:rPr sz="1100">
+                <a:spcPts val="400"/>
+              </a:spcAft>
+            </a:pPr>
+            <a:r>
+              <a:rPr sz="1050">
                 <a:solidFill>
                   <a:srgbClr val="1E293B"/>
                 </a:solidFill>
@@ -8718,14 +9784,14 @@
           <a:p>
             <a:pPr>
               <a:spcBef>
-                <a:spcPts val="800"/>
+                <a:spcPts val="400"/>
               </a:spcBef>
               <a:spcAft>
-                <a:spcPts val="200"/>
-              </a:spcAft>
-            </a:pPr>
-            <a:r>
-              <a:rPr b="1" sz="1300">
+                <a:spcPts val="100"/>
+              </a:spcAft>
+            </a:pPr>
+            <a:r>
+              <a:rPr b="1" sz="1200">
                 <a:solidFill>
                   <a:srgbClr val="1B365D"/>
                 </a:solidFill>
@@ -8736,11 +9802,11 @@
           <a:p>
             <a:pPr lvl="1">
               <a:spcAft>
-                <a:spcPts val="600"/>
-              </a:spcAft>
-            </a:pPr>
-            <a:r>
-              <a:rPr sz="1100">
+                <a:spcPts val="400"/>
+              </a:spcAft>
+            </a:pPr>
+            <a:r>
+              <a:rPr sz="1050">
                 <a:solidFill>
                   <a:srgbClr val="1E293B"/>
                 </a:solidFill>
@@ -8751,14 +9817,14 @@
           <a:p>
             <a:pPr>
               <a:spcBef>
-                <a:spcPts val="800"/>
+                <a:spcPts val="400"/>
               </a:spcBef>
               <a:spcAft>
-                <a:spcPts val="200"/>
-              </a:spcAft>
-            </a:pPr>
-            <a:r>
-              <a:rPr b="1" sz="1300">
+                <a:spcPts val="100"/>
+              </a:spcAft>
+            </a:pPr>
+            <a:r>
+              <a:rPr b="1" sz="1200">
                 <a:solidFill>
                   <a:srgbClr val="1B365D"/>
                 </a:solidFill>
@@ -8769,11 +9835,11 @@
           <a:p>
             <a:pPr lvl="1">
               <a:spcAft>
-                <a:spcPts val="600"/>
-              </a:spcAft>
-            </a:pPr>
-            <a:r>
-              <a:rPr sz="1100">
+                <a:spcPts val="400"/>
+              </a:spcAft>
+            </a:pPr>
+            <a:r>
+              <a:rPr sz="1050">
                 <a:solidFill>
                   <a:srgbClr val="1E293B"/>
                 </a:solidFill>
@@ -8784,14 +9850,14 @@
           <a:p>
             <a:pPr>
               <a:spcBef>
-                <a:spcPts val="800"/>
+                <a:spcPts val="400"/>
               </a:spcBef>
               <a:spcAft>
-                <a:spcPts val="200"/>
-              </a:spcAft>
-            </a:pPr>
-            <a:r>
-              <a:rPr b="1" sz="1300">
+                <a:spcPts val="100"/>
+              </a:spcAft>
+            </a:pPr>
+            <a:r>
+              <a:rPr b="1" sz="1200">
                 <a:solidFill>
                   <a:srgbClr val="1B365D"/>
                 </a:solidFill>
@@ -8802,11 +9868,11 @@
           <a:p>
             <a:pPr lvl="1">
               <a:spcAft>
-                <a:spcPts val="600"/>
-              </a:spcAft>
-            </a:pPr>
-            <a:r>
-              <a:rPr sz="1100">
+                <a:spcPts val="400"/>
+              </a:spcAft>
+            </a:pPr>
+            <a:r>
+              <a:rPr sz="1050">
                 <a:solidFill>
                   <a:srgbClr val="1E293B"/>
                 </a:solidFill>
@@ -8817,34 +9883,34 @@
           <a:p>
             <a:pPr>
               <a:spcBef>
-                <a:spcPts val="800"/>
+                <a:spcPts val="400"/>
               </a:spcBef>
               <a:spcAft>
-                <a:spcPts val="200"/>
-              </a:spcAft>
-            </a:pPr>
-            <a:r>
-              <a:rPr b="1" sz="1300">
+                <a:spcPts val="100"/>
+              </a:spcAft>
+            </a:pPr>
+            <a:r>
+              <a:rPr b="1" sz="1200">
                 <a:solidFill>
                   <a:srgbClr val="1B365D"/>
                 </a:solidFill>
               </a:rPr>
-              <a:t>Code Repository</a:t>
+              <a:t>Lab Code URL</a:t>
             </a:r>
           </a:p>
           <a:p>
             <a:pPr lvl="1">
               <a:spcAft>
-                <a:spcPts val="600"/>
-              </a:spcAft>
-            </a:pPr>
-            <a:r>
-              <a:rPr sz="1100">
+                <a:spcPts val="400"/>
+              </a:spcAft>
+            </a:pPr>
+            <a:r>
+              <a:rPr sz="1050">
                 <a:solidFill>
                   <a:srgbClr val="1E293B"/>
                 </a:solidFill>
               </a:rPr>
-              <a:t>Full wrangling notebook available at: https://github.com/alfaturachman/IBM-Applied-Data-Science-Capstone</a:t>
+              <a:t>Dedicated Data Wrangling Notebook: https://github.com/Alfaturachman/IBM-Applied-Data-Science-Capstone/blob/main/labs-jupyter-spacex-Data-wrangling-v2.ipynb</a:t>
             </a:r>
           </a:p>
         </p:txBody>
@@ -8995,7 +10061,7 @@
             <a:pPr>
               <a:defRPr sz="1100">
                 <a:solidFill>
-                  <a:srgbClr val="E2E8F0"/>
+                  <a:srgbClr val="D4AF37"/>
                 </a:solidFill>
                 <a:latin typeface="Arial"/>
               </a:defRPr>
@@ -9008,7 +10074,43 @@
       </p:sp>
       <p:sp>
         <p:nvSpPr>
-          <p:cNvPr id="5" name="Rectangle 4"/>
+          <p:cNvPr id="5" name="TextBox 4"/>
+          <p:cNvSpPr txBox="1"/>
+          <p:nvPr/>
+        </p:nvSpPr>
+        <p:spPr>
+          <a:xfrm>
+            <a:off x="8412480" y="137160"/>
+            <a:ext cx="3291840" cy="548640"/>
+          </a:xfrm>
+          <a:prstGeom prst="rect">
+            <a:avLst/>
+          </a:prstGeom>
+          <a:noFill/>
+        </p:spPr>
+        <p:txBody>
+          <a:bodyPr wrap="none">
+            <a:spAutoFit/>
+          </a:bodyPr>
+          <a:lstStyle/>
+          <a:p>
+            <a:pPr>
+              <a:defRPr sz="1100" b="1">
+                <a:solidFill>
+                  <a:srgbClr val="FFFFFF"/>
+                </a:solidFill>
+                <a:latin typeface="Arial"/>
+              </a:defRPr>
+            </a:pPr>
+            <a:r>
+              <a:t>IBM Applied Data Science Capstone</a:t>
+            </a:r>
+          </a:p>
+        </p:txBody>
+      </p:sp>
+      <p:sp>
+        <p:nvSpPr>
+          <p:cNvPr id="6" name="Rectangle 5"/>
           <p:cNvSpPr/>
           <p:nvPr/>
         </p:nvSpPr>
@@ -9053,13 +10155,13 @@
       </p:sp>
       <p:sp>
         <p:nvSpPr>
-          <p:cNvPr id="6" name="TextBox 5"/>
+          <p:cNvPr id="7" name="TextBox 6"/>
           <p:cNvSpPr txBox="1"/>
           <p:nvPr/>
         </p:nvSpPr>
         <p:spPr>
           <a:xfrm>
-            <a:off x="457200" y="6473952"/>
+            <a:off x="457200" y="6492240"/>
             <a:ext cx="11277295" cy="320040"/>
           </a:xfrm>
           <a:prstGeom prst="rect">
@@ -9074,7 +10176,7 @@
           <a:lstStyle/>
           <a:p>
             <a:pPr>
-              <a:defRPr sz="1000">
+              <a:defRPr sz="950">
                 <a:solidFill>
                   <a:srgbClr val="64748B"/>
                 </a:solidFill>
@@ -9082,21 +10184,21 @@
               </a:defRPr>
             </a:pPr>
             <a:r>
-              <a:t>IBM Applied Data Science Capstone | Learner: alfaturachman | GitHub: https://github.com/alfaturachman/IBM-Applied-Data-Science-Capstone</a:t>
-            </a:r>
-          </a:p>
-        </p:txBody>
-      </p:sp>
-      <p:sp>
-        <p:nvSpPr>
-          <p:cNvPr id="7" name="TextBox 6"/>
+              <a:t>SpaceX Falcon 9 Landing Prediction | Executive Portfolio Report | Learner: alfaturachman</a:t>
+            </a:r>
+          </a:p>
+        </p:txBody>
+      </p:sp>
+      <p:sp>
+        <p:nvSpPr>
+          <p:cNvPr id="8" name="TextBox 7"/>
           <p:cNvSpPr txBox="1"/>
           <p:nvPr/>
         </p:nvSpPr>
         <p:spPr>
           <a:xfrm>
-            <a:off x="548640" y="1051560"/>
-            <a:ext cx="11094415" cy="5212080"/>
+            <a:off x="548640" y="1005840"/>
+            <a:ext cx="11094415" cy="5303520"/>
           </a:xfrm>
           <a:prstGeom prst="rect">
             <a:avLst/>
@@ -9108,18 +10210,17 @@
             <a:spAutoFit/>
           </a:bodyPr>
           <a:lstStyle/>
-          <a:p/>
           <a:p>
             <a:pPr>
               <a:spcBef>
-                <a:spcPts val="800"/>
+                <a:spcPts val="0"/>
               </a:spcBef>
               <a:spcAft>
-                <a:spcPts val="200"/>
-              </a:spcAft>
-            </a:pPr>
-            <a:r>
-              <a:rPr b="1" sz="1300">
+                <a:spcPts val="100"/>
+              </a:spcAft>
+            </a:pPr>
+            <a:r>
+              <a:rPr b="1" sz="1200">
                 <a:solidFill>
                   <a:srgbClr val="1B365D"/>
                 </a:solidFill>
@@ -9130,11 +10231,11 @@
           <a:p>
             <a:pPr lvl="1">
               <a:spcAft>
-                <a:spcPts val="600"/>
-              </a:spcAft>
-            </a:pPr>
-            <a:r>
-              <a:rPr sz="1100">
+                <a:spcPts val="400"/>
+              </a:spcAft>
+            </a:pPr>
+            <a:r>
+              <a:rPr sz="1050">
                 <a:solidFill>
                   <a:srgbClr val="1E293B"/>
                 </a:solidFill>
@@ -9145,14 +10246,14 @@
           <a:p>
             <a:pPr>
               <a:spcBef>
-                <a:spcPts val="800"/>
+                <a:spcPts val="400"/>
               </a:spcBef>
               <a:spcAft>
-                <a:spcPts val="200"/>
-              </a:spcAft>
-            </a:pPr>
-            <a:r>
-              <a:rPr b="1" sz="1300">
+                <a:spcPts val="100"/>
+              </a:spcAft>
+            </a:pPr>
+            <a:r>
+              <a:rPr b="1" sz="1200">
                 <a:solidFill>
                   <a:srgbClr val="1B365D"/>
                 </a:solidFill>
@@ -9163,11 +10264,11 @@
           <a:p>
             <a:pPr lvl="1">
               <a:spcAft>
-                <a:spcPts val="600"/>
-              </a:spcAft>
-            </a:pPr>
-            <a:r>
-              <a:rPr sz="1100">
+                <a:spcPts val="400"/>
+              </a:spcAft>
+            </a:pPr>
+            <a:r>
+              <a:rPr sz="1050">
                 <a:solidFill>
                   <a:srgbClr val="1E293B"/>
                 </a:solidFill>
@@ -9178,14 +10279,14 @@
           <a:p>
             <a:pPr>
               <a:spcBef>
-                <a:spcPts val="800"/>
+                <a:spcPts val="400"/>
               </a:spcBef>
               <a:spcAft>
-                <a:spcPts val="200"/>
-              </a:spcAft>
-            </a:pPr>
-            <a:r>
-              <a:rPr b="1" sz="1300">
+                <a:spcPts val="100"/>
+              </a:spcAft>
+            </a:pPr>
+            <a:r>
+              <a:rPr b="1" sz="1200">
                 <a:solidFill>
                   <a:srgbClr val="1B365D"/>
                 </a:solidFill>
@@ -9196,11 +10297,11 @@
           <a:p>
             <a:pPr lvl="1">
               <a:spcAft>
-                <a:spcPts val="600"/>
-              </a:spcAft>
-            </a:pPr>
-            <a:r>
-              <a:rPr sz="1100">
+                <a:spcPts val="400"/>
+              </a:spcAft>
+            </a:pPr>
+            <a:r>
+              <a:rPr sz="1050">
                 <a:solidFill>
                   <a:srgbClr val="1E293B"/>
                 </a:solidFill>
@@ -9211,14 +10312,14 @@
           <a:p>
             <a:pPr>
               <a:spcBef>
-                <a:spcPts val="800"/>
+                <a:spcPts val="400"/>
               </a:spcBef>
               <a:spcAft>
-                <a:spcPts val="200"/>
-              </a:spcAft>
-            </a:pPr>
-            <a:r>
-              <a:rPr b="1" sz="1300">
+                <a:spcPts val="100"/>
+              </a:spcAft>
+            </a:pPr>
+            <a:r>
+              <a:rPr b="1" sz="1200">
                 <a:solidFill>
                   <a:srgbClr val="1B365D"/>
                 </a:solidFill>
@@ -9229,11 +10330,11 @@
           <a:p>
             <a:pPr lvl="1">
               <a:spcAft>
-                <a:spcPts val="600"/>
-              </a:spcAft>
-            </a:pPr>
-            <a:r>
-              <a:rPr sz="1100">
+                <a:spcPts val="400"/>
+              </a:spcAft>
+            </a:pPr>
+            <a:r>
+              <a:rPr sz="1050">
                 <a:solidFill>
                   <a:srgbClr val="1E293B"/>
                 </a:solidFill>
@@ -9244,14 +10345,14 @@
           <a:p>
             <a:pPr>
               <a:spcBef>
-                <a:spcPts val="800"/>
+                <a:spcPts val="400"/>
               </a:spcBef>
               <a:spcAft>
-                <a:spcPts val="200"/>
-              </a:spcAft>
-            </a:pPr>
-            <a:r>
-              <a:rPr b="1" sz="1300">
+                <a:spcPts val="100"/>
+              </a:spcAft>
+            </a:pPr>
+            <a:r>
+              <a:rPr b="1" sz="1200">
                 <a:solidFill>
                   <a:srgbClr val="1B365D"/>
                 </a:solidFill>
@@ -9262,11 +10363,11 @@
           <a:p>
             <a:pPr lvl="1">
               <a:spcAft>
-                <a:spcPts val="600"/>
-              </a:spcAft>
-            </a:pPr>
-            <a:r>
-              <a:rPr sz="1100">
+                <a:spcPts val="400"/>
+              </a:spcAft>
+            </a:pPr>
+            <a:r>
+              <a:rPr sz="1050">
                 <a:solidFill>
                   <a:srgbClr val="1E293B"/>
                 </a:solidFill>
@@ -9277,34 +10378,34 @@
           <a:p>
             <a:pPr>
               <a:spcBef>
-                <a:spcPts val="800"/>
+                <a:spcPts val="400"/>
               </a:spcBef>
               <a:spcAft>
-                <a:spcPts val="200"/>
-              </a:spcAft>
-            </a:pPr>
-            <a:r>
-              <a:rPr b="1" sz="1300">
+                <a:spcPts val="100"/>
+              </a:spcAft>
+            </a:pPr>
+            <a:r>
+              <a:rPr b="1" sz="1200">
                 <a:solidFill>
                   <a:srgbClr val="1B365D"/>
                 </a:solidFill>
               </a:rPr>
-              <a:t>Code Repository</a:t>
+              <a:t>Lab Code URL</a:t>
             </a:r>
           </a:p>
           <a:p>
             <a:pPr lvl="1">
               <a:spcAft>
-                <a:spcPts val="600"/>
-              </a:spcAft>
-            </a:pPr>
-            <a:r>
-              <a:rPr sz="1100">
+                <a:spcPts val="400"/>
+              </a:spcAft>
+            </a:pPr>
+            <a:r>
+              <a:rPr sz="1050">
                 <a:solidFill>
                   <a:srgbClr val="1E293B"/>
                 </a:solidFill>
               </a:rPr>
-              <a:t>Full visualization script available at: https://github.com/alfaturachman/IBM-Applied-Data-Science-Capstone</a:t>
+              <a:t>Dedicated Visualization Notebook: https://github.com/Alfaturachman/IBM-Applied-Data-Science-Capstone/blob/main/jupyter-labs-eda-dataviz-v2.ipynb</a:t>
             </a:r>
           </a:p>
         </p:txBody>
@@ -9448,27 +10549,63 @@
               </a:defRPr>
             </a:pPr>
             <a:r>
-              <a:t>EDA with SQL Methodology</a:t>
+              <a:t>Predictive Analysis (Classification) Methodology</a:t>
             </a:r>
           </a:p>
           <a:p>
             <a:pPr>
               <a:defRPr sz="1100">
                 <a:solidFill>
-                  <a:srgbClr val="E2E8F0"/>
+                  <a:srgbClr val="D4AF37"/>
                 </a:solidFill>
                 <a:latin typeface="Arial"/>
               </a:defRPr>
             </a:pPr>
             <a:r>
-              <a:t>Database Architecture, Schema Setup, and Relational Querying</a:t>
-            </a:r>
-          </a:p>
-        </p:txBody>
-      </p:sp>
-      <p:sp>
-        <p:nvSpPr>
-          <p:cNvPr id="5" name="Rectangle 4"/>
+              <a:t>Feature Standardization, Train-Test Partitioning, Cross-Validation, and Hyperparameter Tuning</a:t>
+            </a:r>
+          </a:p>
+        </p:txBody>
+      </p:sp>
+      <p:sp>
+        <p:nvSpPr>
+          <p:cNvPr id="5" name="TextBox 4"/>
+          <p:cNvSpPr txBox="1"/>
+          <p:nvPr/>
+        </p:nvSpPr>
+        <p:spPr>
+          <a:xfrm>
+            <a:off x="8412480" y="137160"/>
+            <a:ext cx="3291840" cy="548640"/>
+          </a:xfrm>
+          <a:prstGeom prst="rect">
+            <a:avLst/>
+          </a:prstGeom>
+          <a:noFill/>
+        </p:spPr>
+        <p:txBody>
+          <a:bodyPr wrap="none">
+            <a:spAutoFit/>
+          </a:bodyPr>
+          <a:lstStyle/>
+          <a:p>
+            <a:pPr>
+              <a:defRPr sz="1100" b="1">
+                <a:solidFill>
+                  <a:srgbClr val="FFFFFF"/>
+                </a:solidFill>
+                <a:latin typeface="Arial"/>
+              </a:defRPr>
+            </a:pPr>
+            <a:r>
+              <a:t>IBM Applied Data Science Capstone</a:t>
+            </a:r>
+          </a:p>
+        </p:txBody>
+      </p:sp>
+      <p:sp>
+        <p:nvSpPr>
+          <p:cNvPr id="6" name="Rectangle 5"/>
           <p:cNvSpPr/>
           <p:nvPr/>
         </p:nvSpPr>
@@ -9513,13 +10650,13 @@
       </p:sp>
       <p:sp>
         <p:nvSpPr>
-          <p:cNvPr id="6" name="TextBox 5"/>
+          <p:cNvPr id="7" name="TextBox 6"/>
           <p:cNvSpPr txBox="1"/>
           <p:nvPr/>
         </p:nvSpPr>
         <p:spPr>
           <a:xfrm>
-            <a:off x="457200" y="6473952"/>
+            <a:off x="457200" y="6492240"/>
             <a:ext cx="11277295" cy="320040"/>
           </a:xfrm>
           <a:prstGeom prst="rect">
@@ -9534,7 +10671,7 @@
           <a:lstStyle/>
           <a:p>
             <a:pPr>
-              <a:defRPr sz="1000">
+              <a:defRPr sz="950">
                 <a:solidFill>
                   <a:srgbClr val="64748B"/>
                 </a:solidFill>
@@ -9542,21 +10679,21 @@
               </a:defRPr>
             </a:pPr>
             <a:r>
-              <a:t>IBM Applied Data Science Capstone | Learner: alfaturachman | GitHub: https://github.com/alfaturachman/IBM-Applied-Data-Science-Capstone</a:t>
-            </a:r>
-          </a:p>
-        </p:txBody>
-      </p:sp>
-      <p:sp>
-        <p:nvSpPr>
-          <p:cNvPr id="7" name="TextBox 6"/>
+              <a:t>SpaceX Falcon 9 Landing Prediction | Executive Portfolio Report | Learner: alfaturachman</a:t>
+            </a:r>
+          </a:p>
+        </p:txBody>
+      </p:sp>
+      <p:sp>
+        <p:nvSpPr>
+          <p:cNvPr id="8" name="TextBox 7"/>
           <p:cNvSpPr txBox="1"/>
           <p:nvPr/>
         </p:nvSpPr>
         <p:spPr>
           <a:xfrm>
-            <a:off x="548640" y="1051560"/>
-            <a:ext cx="11094415" cy="5212080"/>
+            <a:off x="548640" y="1005840"/>
+            <a:ext cx="11094415" cy="5303520"/>
           </a:xfrm>
           <a:prstGeom prst="rect">
             <a:avLst/>
@@ -9568,137 +10705,169 @@
             <a:spAutoFit/>
           </a:bodyPr>
           <a:lstStyle/>
-          <a:p/>
           <a:p>
             <a:pPr>
               <a:spcBef>
-                <a:spcPts val="800"/>
+                <a:spcPts val="0"/>
               </a:spcBef>
               <a:spcAft>
-                <a:spcPts val="200"/>
-              </a:spcAft>
-            </a:pPr>
-            <a:r>
-              <a:rPr b="1" sz="1300">
+                <a:spcPts val="100"/>
+              </a:spcAft>
+            </a:pPr>
+            <a:r>
+              <a:rPr b="1" sz="1200">
                 <a:solidFill>
                   <a:srgbClr val="1B365D"/>
                 </a:solidFill>
               </a:rPr>
-              <a:t>Database Environment</a:t>
+              <a:t>Feature Scaling (StandardScaler)</a:t>
             </a:r>
           </a:p>
           <a:p>
             <a:pPr lvl="1">
               <a:spcAft>
-                <a:spcPts val="600"/>
-              </a:spcAft>
-            </a:pPr>
-            <a:r>
-              <a:rPr sz="1100">
+                <a:spcPts val="400"/>
+              </a:spcAft>
+            </a:pPr>
+            <a:r>
+              <a:rPr sz="1050">
                 <a:solidFill>
                   <a:srgbClr val="1E293B"/>
                 </a:solidFill>
               </a:rPr>
-              <a:t>Loaded the cleaned SpaceX dataset into an embedded SQLite database (my_data1.db) using sqlite3 and the %sql IPython extension.</a:t>
+              <a:t>Transformed the 80-feature matrix using StandardScaler (z = (x - mean)/std) to ensure scale-sensitive algorithms (SVM, KNN, Logistic Regression) converge without feature bias.</a:t>
             </a:r>
           </a:p>
           <a:p>
             <a:pPr>
               <a:spcBef>
-                <a:spcPts val="800"/>
+                <a:spcPts val="400"/>
               </a:spcBef>
               <a:spcAft>
-                <a:spcPts val="200"/>
-              </a:spcAft>
-            </a:pPr>
-            <a:r>
-              <a:rPr b="1" sz="1300">
+                <a:spcPts val="100"/>
+              </a:spcAft>
+            </a:pPr>
+            <a:r>
+              <a:rPr b="1" sz="1200">
                 <a:solidFill>
                   <a:srgbClr val="1B365D"/>
                 </a:solidFill>
               </a:rPr>
-              <a:t>Table Schema Setup</a:t>
+              <a:t>Data Splitting</a:t>
             </a:r>
           </a:p>
           <a:p>
             <a:pPr lvl="1">
               <a:spcAft>
-                <a:spcPts val="600"/>
-              </a:spcAft>
-            </a:pPr>
-            <a:r>
-              <a:rPr sz="1100">
+                <a:spcPts val="400"/>
+              </a:spcAft>
+            </a:pPr>
+            <a:r>
+              <a:rPr sz="1050">
                 <a:solidFill>
                   <a:srgbClr val="1E293B"/>
                 </a:solidFill>
               </a:rPr>
-              <a:t>Configured table SPACEXTBL with appropriate data types for Date, Booster_Version, Launch_Site, Payload, PAYLOAD_MASS__KG_, Orbit, Customer, Mission_Outcome, and Landing_Outcome.</a:t>
+              <a:t>Partitioned dataset using train_test_split(X, Y, test_size=0.2, random_state=2), yielding exactly 72 training samples and 18 test samples.</a:t>
             </a:r>
           </a:p>
           <a:p>
             <a:pPr>
               <a:spcBef>
-                <a:spcPts val="800"/>
+                <a:spcPts val="400"/>
               </a:spcBef>
               <a:spcAft>
-                <a:spcPts val="200"/>
-              </a:spcAft>
-            </a:pPr>
-            <a:r>
-              <a:rPr b="1" sz="1300">
+                <a:spcPts val="100"/>
+              </a:spcAft>
+            </a:pPr>
+            <a:r>
+              <a:rPr b="1" sz="1200">
                 <a:solidFill>
                   <a:srgbClr val="1B365D"/>
                 </a:solidFill>
               </a:rPr>
-              <a:t>Core SQL Queries Executed</a:t>
+              <a:t>Cross-Validation &amp; Grid Search</a:t>
             </a:r>
           </a:p>
           <a:p>
             <a:pPr lvl="1">
               <a:spcAft>
-                <a:spcPts val="600"/>
-              </a:spcAft>
-            </a:pPr>
-            <a:r>
-              <a:rPr sz="1100">
+                <a:spcPts val="400"/>
+              </a:spcAft>
+            </a:pPr>
+            <a:r>
+              <a:rPr sz="1050">
                 <a:solidFill>
                   <a:srgbClr val="1E293B"/>
                 </a:solidFill>
               </a:rPr>
-              <a:t>1. Distinct launch sites (SELECT DISTINCT Launch_Site). 2. NASA payload accumulation (SUM(PAYLOAD_MASS__KG_) WHERE Customer='NASA (CRS)'). 3. Average payload mass for successful landings (AVG). 4. First ground pad landing date (MIN(Date) WHERE Landing_Outcome='Success (ground pad)'). 5. Drone ship successes between 4,000-6,000 kg. 6. Maximum payload boosters.</a:t>
+              <a:t>Applied 10-fold cross-validation (cv=10) with GridSearchCV to tune hyperparameters: Logistic Regression (C, penalty, solver), SVM (kernel, C, gamma), Decision Tree (criterion, max_depth, splitter, min_samples_split), and KNN (n_neighbors, p, algorithm).</a:t>
             </a:r>
           </a:p>
           <a:p>
             <a:pPr>
               <a:spcBef>
-                <a:spcPts val="800"/>
+                <a:spcPts val="400"/>
               </a:spcBef>
               <a:spcAft>
-                <a:spcPts val="200"/>
-              </a:spcAft>
-            </a:pPr>
-            <a:r>
-              <a:rPr b="1" sz="1300">
+                <a:spcPts val="100"/>
+              </a:spcAft>
+            </a:pPr>
+            <a:r>
+              <a:rPr b="1" sz="1200">
                 <a:solidFill>
                   <a:srgbClr val="1B365D"/>
                 </a:solidFill>
               </a:rPr>
-              <a:t>Code Repository</a:t>
+              <a:t>Model Selection Strategy</a:t>
             </a:r>
           </a:p>
           <a:p>
             <a:pPr lvl="1">
               <a:spcAft>
-                <a:spcPts val="600"/>
-              </a:spcAft>
-            </a:pPr>
-            <a:r>
-              <a:rPr sz="1100">
+                <a:spcPts val="400"/>
+              </a:spcAft>
+            </a:pPr>
+            <a:r>
+              <a:rPr sz="1050">
                 <a:solidFill>
                   <a:srgbClr val="1E293B"/>
                 </a:solidFill>
               </a:rPr>
-              <a:t>Full SQL queries and database available at: https://github.com/alfaturachman/IBM-Applied-Data-Science-Capstone</a:t>
+              <a:t>Evaluated models using both 10-fold CV validation scores and generalization performance on the unseen 18-sample test dataset.</a:t>
+            </a:r>
+          </a:p>
+          <a:p>
+            <a:pPr>
+              <a:spcBef>
+                <a:spcPts val="400"/>
+              </a:spcBef>
+              <a:spcAft>
+                <a:spcPts val="100"/>
+              </a:spcAft>
+            </a:pPr>
+            <a:r>
+              <a:rPr b="1" sz="1200">
+                <a:solidFill>
+                  <a:srgbClr val="1B365D"/>
+                </a:solidFill>
+              </a:rPr>
+              <a:t>Lab Code URL</a:t>
+            </a:r>
+          </a:p>
+          <a:p>
+            <a:pPr lvl="1">
+              <a:spcAft>
+                <a:spcPts val="400"/>
+              </a:spcAft>
+            </a:pPr>
+            <a:r>
+              <a:rPr sz="1050">
+                <a:solidFill>
+                  <a:srgbClr val="1E293B"/>
+                </a:solidFill>
+              </a:rPr>
+              <a:t>Dedicated Machine Learning Notebook: https://github.com/Alfaturachman/IBM-Applied-Data-Science-Capstone/blob/main/SpaceX-Machine-Learning-Prediction-Part-5-v1.ipynb</a:t>
             </a:r>
           </a:p>
         </p:txBody>
@@ -9842,27 +11011,63 @@
               </a:defRPr>
             </a:pPr>
             <a:r>
-              <a:t>Interactive Visual Analytics Methodology</a:t>
+              <a:t>EDA with Visualization Results: Flight Number vs. Payload Mass</a:t>
             </a:r>
           </a:p>
           <a:p>
             <a:pPr>
               <a:defRPr sz="1100">
                 <a:solidFill>
-                  <a:srgbClr val="E2E8F0"/>
+                  <a:srgbClr val="D4AF37"/>
                 </a:solidFill>
                 <a:latin typeface="Arial"/>
               </a:defRPr>
             </a:pPr>
             <a:r>
-              <a:t>Geospatial Folium Mapping &amp; Reactive Plotly Dash Web Application Architecture</a:t>
-            </a:r>
-          </a:p>
-        </p:txBody>
-      </p:sp>
-      <p:sp>
-        <p:nvSpPr>
-          <p:cNvPr id="5" name="Rectangle 4"/>
+              <a:t>Evaluating Recovery Success Across Launch Progression and Mission Scale</a:t>
+            </a:r>
+          </a:p>
+        </p:txBody>
+      </p:sp>
+      <p:sp>
+        <p:nvSpPr>
+          <p:cNvPr id="5" name="TextBox 4"/>
+          <p:cNvSpPr txBox="1"/>
+          <p:nvPr/>
+        </p:nvSpPr>
+        <p:spPr>
+          <a:xfrm>
+            <a:off x="8412480" y="137160"/>
+            <a:ext cx="3291840" cy="548640"/>
+          </a:xfrm>
+          <a:prstGeom prst="rect">
+            <a:avLst/>
+          </a:prstGeom>
+          <a:noFill/>
+        </p:spPr>
+        <p:txBody>
+          <a:bodyPr wrap="none">
+            <a:spAutoFit/>
+          </a:bodyPr>
+          <a:lstStyle/>
+          <a:p>
+            <a:pPr>
+              <a:defRPr sz="1100" b="1">
+                <a:solidFill>
+                  <a:srgbClr val="FFFFFF"/>
+                </a:solidFill>
+                <a:latin typeface="Arial"/>
+              </a:defRPr>
+            </a:pPr>
+            <a:r>
+              <a:t>IBM Applied Data Science Capstone</a:t>
+            </a:r>
+          </a:p>
+        </p:txBody>
+      </p:sp>
+      <p:sp>
+        <p:nvSpPr>
+          <p:cNvPr id="6" name="Rectangle 5"/>
           <p:cNvSpPr/>
           <p:nvPr/>
         </p:nvSpPr>
@@ -9907,13 +11112,13 @@
       </p:sp>
       <p:sp>
         <p:nvSpPr>
-          <p:cNvPr id="6" name="TextBox 5"/>
+          <p:cNvPr id="7" name="TextBox 6"/>
           <p:cNvSpPr txBox="1"/>
           <p:nvPr/>
         </p:nvSpPr>
         <p:spPr>
           <a:xfrm>
-            <a:off x="457200" y="6473952"/>
+            <a:off x="457200" y="6492240"/>
             <a:ext cx="11277295" cy="320040"/>
           </a:xfrm>
           <a:prstGeom prst="rect">
@@ -9928,7 +11133,7 @@
           <a:lstStyle/>
           <a:p>
             <a:pPr>
-              <a:defRPr sz="1000">
+              <a:defRPr sz="950">
                 <a:solidFill>
                   <a:srgbClr val="64748B"/>
                 </a:solidFill>
@@ -9936,21 +11141,21 @@
               </a:defRPr>
             </a:pPr>
             <a:r>
-              <a:t>IBM Applied Data Science Capstone | Learner: alfaturachman | GitHub: https://github.com/alfaturachman/IBM-Applied-Data-Science-Capstone</a:t>
-            </a:r>
-          </a:p>
-        </p:txBody>
-      </p:sp>
-      <p:sp>
-        <p:nvSpPr>
-          <p:cNvPr id="7" name="TextBox 6"/>
+              <a:t>SpaceX Falcon 9 Landing Prediction | Executive Portfolio Report | Learner: alfaturachman</a:t>
+            </a:r>
+          </a:p>
+        </p:txBody>
+      </p:sp>
+      <p:sp>
+        <p:nvSpPr>
+          <p:cNvPr id="8" name="TextBox 7"/>
           <p:cNvSpPr txBox="1"/>
           <p:nvPr/>
         </p:nvSpPr>
         <p:spPr>
           <a:xfrm>
-            <a:off x="548640" y="1051560"/>
-            <a:ext cx="11094415" cy="5212080"/>
+            <a:off x="548640" y="1005840"/>
+            <a:ext cx="6217920" cy="5303520"/>
           </a:xfrm>
           <a:prstGeom prst="rect">
             <a:avLst/>
@@ -9962,174 +11167,164 @@
             <a:spAutoFit/>
           </a:bodyPr>
           <a:lstStyle/>
-          <a:p/>
           <a:p>
             <a:pPr>
               <a:spcBef>
-                <a:spcPts val="800"/>
+                <a:spcPts val="0"/>
               </a:spcBef>
               <a:spcAft>
-                <a:spcPts val="200"/>
-              </a:spcAft>
-            </a:pPr>
-            <a:r>
-              <a:rPr b="1" sz="1300">
+                <a:spcPts val="100"/>
+              </a:spcAft>
+            </a:pPr>
+            <a:r>
+              <a:rPr b="1" sz="1200">
                 <a:solidFill>
                   <a:srgbClr val="1B365D"/>
                 </a:solidFill>
               </a:rPr>
-              <a:t>Folium Geospatial Mapping Framework</a:t>
+              <a:t>Early Flights Learning Curve</a:t>
             </a:r>
           </a:p>
           <a:p>
             <a:pPr lvl="1">
               <a:spcAft>
-                <a:spcPts val="600"/>
-              </a:spcAft>
-            </a:pPr>
-            <a:r>
-              <a:rPr sz="1100">
+                <a:spcPts val="400"/>
+              </a:spcAft>
+            </a:pPr>
+            <a:r>
+              <a:rPr sz="1000">
                 <a:solidFill>
                   <a:srgbClr val="1E293B"/>
                 </a:solidFill>
               </a:rPr>
-              <a:t>Built Leaflet.js-based interactive maps centered on US launch facilities. Added 1,000-meter safety radius circles (folium.Circle) and clustered launch outcomes (MarkerCluster) with green/red markers.</a:t>
+              <a:t>Launches 1-25 exhibited high failure rates as SpaceX iteratively tested atmospheric re-entry burn profiles and grid fin control algorithms.</a:t>
             </a:r>
           </a:p>
           <a:p>
             <a:pPr>
               <a:spcBef>
-                <a:spcPts val="800"/>
+                <a:spcPts val="400"/>
               </a:spcBef>
               <a:spcAft>
-                <a:spcPts val="200"/>
-              </a:spcAft>
-            </a:pPr>
-            <a:r>
-              <a:rPr b="1" sz="1300">
+                <a:spcPts val="100"/>
+              </a:spcAft>
+            </a:pPr>
+            <a:r>
+              <a:rPr b="1" sz="1200">
                 <a:solidFill>
                   <a:srgbClr val="1B365D"/>
                 </a:solidFill>
               </a:rPr>
-              <a:t>Haversine Proximity Calculations</a:t>
+              <a:t>Operational Maturation</a:t>
             </a:r>
           </a:p>
           <a:p>
             <a:pPr lvl="1">
               <a:spcAft>
-                <a:spcPts val="600"/>
-              </a:spcAft>
-            </a:pPr>
-            <a:r>
-              <a:rPr sz="1100">
+                <a:spcPts val="400"/>
+              </a:spcAft>
+            </a:pPr>
+            <a:r>
+              <a:rPr sz="1000">
                 <a:solidFill>
                   <a:srgbClr val="1E293B"/>
                 </a:solidFill>
               </a:rPr>
-              <a:t>Calculated spherical geodetic distances from launch pads to coastlines, highways, railways, and cities, visualizing proximity lines via folium.PolyLine.</a:t>
+              <a:t>Launches beyond flight #40 demonstrated a landing success rate exceeding 80%, regardless of launch pad.</a:t>
             </a:r>
           </a:p>
           <a:p>
             <a:pPr>
               <a:spcBef>
-                <a:spcPts val="800"/>
+                <a:spcPts val="400"/>
               </a:spcBef>
               <a:spcAft>
-                <a:spcPts val="200"/>
-              </a:spcAft>
-            </a:pPr>
-            <a:r>
-              <a:rPr b="1" sz="1300">
+                <a:spcPts val="100"/>
+              </a:spcAft>
+            </a:pPr>
+            <a:r>
+              <a:rPr b="1" sz="1200">
                 <a:solidFill>
                   <a:srgbClr val="1B365D"/>
                 </a:solidFill>
               </a:rPr>
-              <a:t>Plotly Dash Web Application Framework</a:t>
+              <a:t>Heavy Payload Clustering</a:t>
             </a:r>
           </a:p>
           <a:p>
             <a:pPr lvl="1">
               <a:spcAft>
-                <a:spcPts val="600"/>
-              </a:spcAft>
-            </a:pPr>
-            <a:r>
-              <a:rPr sz="1100">
+                <a:spcPts val="400"/>
+              </a:spcAft>
+            </a:pPr>
+            <a:r>
+              <a:rPr sz="1000">
                 <a:solidFill>
                   <a:srgbClr val="1E293B"/>
                 </a:solidFill>
               </a:rPr>
-              <a:t>Constructed reactive Python web application with dcc.Dropdown (ALL sites vs. specific site) and dcc.RangeSlider (payload mass 0 - 10,000 kg).</a:t>
+              <a:t>Massive payload missions (&gt;8,000 kg) were clustered in later flights (principally Starlink satellite batches to LEO), all achieving near-perfect recovery records.</a:t>
             </a:r>
           </a:p>
           <a:p>
             <a:pPr>
               <a:spcBef>
-                <a:spcPts val="800"/>
+                <a:spcPts val="400"/>
               </a:spcBef>
               <a:spcAft>
-                <a:spcPts val="200"/>
-              </a:spcAft>
-            </a:pPr>
-            <a:r>
-              <a:rPr b="1" sz="1300">
+                <a:spcPts val="100"/>
+              </a:spcAft>
+            </a:pPr>
+            <a:r>
+              <a:rPr b="1" sz="1200">
                 <a:solidFill>
                   <a:srgbClr val="1B365D"/>
                 </a:solidFill>
               </a:rPr>
-              <a:t>Reactive Callbacks</a:t>
+              <a:t>Lab Code URL</a:t>
             </a:r>
           </a:p>
           <a:p>
             <a:pPr lvl="1">
               <a:spcAft>
-                <a:spcPts val="600"/>
-              </a:spcAft>
-            </a:pPr>
-            <a:r>
-              <a:rPr sz="1100">
+                <a:spcPts val="400"/>
+              </a:spcAft>
+            </a:pPr>
+            <a:r>
+              <a:rPr sz="1000">
                 <a:solidFill>
                   <a:srgbClr val="1E293B"/>
                 </a:solidFill>
               </a:rPr>
-              <a:t>Configured @app.callback routines to dynamically update px.pie (success counts/ratios) and px.scatter (payload vs outcome colored by booster category).</a:t>
-            </a:r>
-          </a:p>
-          <a:p>
-            <a:pPr>
-              <a:spcBef>
-                <a:spcPts val="800"/>
-              </a:spcBef>
-              <a:spcAft>
-                <a:spcPts val="200"/>
-              </a:spcAft>
-            </a:pPr>
-            <a:r>
-              <a:rPr b="1" sz="1300">
-                <a:solidFill>
-                  <a:srgbClr val="1B365D"/>
-                </a:solidFill>
-              </a:rPr>
-              <a:t>Code Repository</a:t>
-            </a:r>
-          </a:p>
-          <a:p>
-            <a:pPr lvl="1">
-              <a:spcAft>
-                <a:spcPts val="600"/>
-              </a:spcAft>
-            </a:pPr>
-            <a:r>
-              <a:rPr sz="1100">
-                <a:solidFill>
-                  <a:srgbClr val="1E293B"/>
-                </a:solidFill>
-              </a:rPr>
-              <a:t>Application script spacex_dash_app.py available at: https://github.com/alfaturachman/IBM-Applied-Data-Science-Capstone</a:t>
-            </a:r>
-          </a:p>
-        </p:txBody>
-      </p:sp>
+              <a:t>Visual Analytics Notebook: https://github.com/Alfaturachman/IBM-Applied-Data-Science-Capstone/blob/main/jupyter-labs-eda-dataviz-v2.ipynb</a:t>
+            </a:r>
+          </a:p>
+        </p:txBody>
+      </p:sp>
+      <p:pic>
+        <p:nvPicPr>
+          <p:cNvPr id="9" name="Picture 8" descr="eda_scatter.png"/>
+          <p:cNvPicPr>
+            <a:picLocks noChangeAspect="1"/>
+          </p:cNvPicPr>
+          <p:nvPr/>
+        </p:nvPicPr>
+        <p:blipFill>
+          <a:blip r:embed="rId2"/>
+          <a:stretch>
+            <a:fillRect/>
+          </a:stretch>
+        </p:blipFill>
+        <p:spPr>
+          <a:xfrm>
+            <a:off x="6949440" y="1188720"/>
+            <a:ext cx="4754880" cy="2377440"/>
+          </a:xfrm>
+          <a:prstGeom prst="rect">
+            <a:avLst/>
+          </a:prstGeom>
+        </p:spPr>
+      </p:pic>
     </p:spTree>
   </p:cSld>
   <p:clrMapOvr>
